--- a/first_aid_tema1_numbered/1_Организация_оказания_первой_помощи_в_РФ_Нормативно-правовая_база.pptx
+++ b/first_aid_tema1_numbered/1_Организация_оказания_первой_помощи_в_РФ_Нормативно-правовая_база.pptx
@@ -43609,1023 +43609,6 @@
       <p:grpSpPr/>
       <p:sp>
         <p:nvSpPr>
-          <p:cNvPr id="2" name="Rectangle 1"/>
-          <p:cNvSpPr/>
-          <p:nvPr/>
-        </p:nvSpPr>
-        <p:spPr>
-          <a:xfrm>
-            <a:off x="0" y="0"/>
-            <a:ext cx="24384000" cy="13716000"/>
-          </a:xfrm>
-          <a:prstGeom prst="rect">
-            <a:avLst/>
-          </a:prstGeom>
-          <a:solidFill>
-            <a:srgbClr val="FFFFFF"/>
-          </a:solidFill>
-          <a:ln>
-            <a:noFill/>
-          </a:ln>
-        </p:spPr>
-        <p:style>
-          <a:lnRef idx="1">
-            <a:schemeClr val="accent1"/>
-          </a:lnRef>
-          <a:fillRef idx="3">
-            <a:schemeClr val="accent1"/>
-          </a:fillRef>
-          <a:effectRef idx="2">
-            <a:schemeClr val="accent1"/>
-          </a:effectRef>
-          <a:fontRef idx="minor">
-            <a:schemeClr val="lt1"/>
-          </a:fontRef>
-        </p:style>
-        <p:txBody>
-          <a:bodyPr rtlCol="0" anchor="ctr"/>
-          <a:lstStyle/>
-          <a:p>
-            <a:pPr algn="ctr"/>
-          </a:p>
-        </p:txBody>
-      </p:sp>
-      <p:sp>
-        <p:nvSpPr>
-          <p:cNvPr id="3" name="Rectangle 2"/>
-          <p:cNvSpPr/>
-          <p:nvPr/>
-        </p:nvSpPr>
-        <p:spPr>
-          <a:xfrm>
-            <a:off x="0" y="0"/>
-            <a:ext cx="180000" cy="13716000"/>
-          </a:xfrm>
-          <a:prstGeom prst="rect">
-            <a:avLst/>
-          </a:prstGeom>
-          <a:solidFill>
-            <a:srgbClr val="E30613"/>
-          </a:solidFill>
-          <a:ln>
-            <a:noFill/>
-          </a:ln>
-        </p:spPr>
-        <p:style>
-          <a:lnRef idx="1">
-            <a:schemeClr val="accent1"/>
-          </a:lnRef>
-          <a:fillRef idx="3">
-            <a:schemeClr val="accent1"/>
-          </a:fillRef>
-          <a:effectRef idx="2">
-            <a:schemeClr val="accent1"/>
-          </a:effectRef>
-          <a:fontRef idx="minor">
-            <a:schemeClr val="lt1"/>
-          </a:fontRef>
-        </p:style>
-        <p:txBody>
-          <a:bodyPr rtlCol="0" anchor="ctr"/>
-          <a:lstStyle/>
-          <a:p>
-            <a:pPr algn="ctr"/>
-          </a:p>
-        </p:txBody>
-      </p:sp>
-      <p:sp>
-        <p:nvSpPr>
-          <p:cNvPr id="4" name="TextBox 3"/>
-          <p:cNvSpPr txBox="1"/>
-          <p:nvPr/>
-        </p:nvSpPr>
-        <p:spPr>
-          <a:xfrm>
-            <a:off x="220000" y="6540000"/>
-            <a:ext cx="900000" cy="600000"/>
-          </a:xfrm>
-          <a:prstGeom prst="rect">
-            <a:avLst/>
-          </a:prstGeom>
-          <a:noFill/>
-        </p:spPr>
-        <p:txBody>
-          <a:bodyPr wrap="square">
-            <a:spAutoFit/>
-          </a:bodyPr>
-          <a:lstStyle/>
-          <a:p>
-            <a:pPr algn="l"/>
-            <a:r>
-              <a:rPr sz="2200" b="1">
-                <a:solidFill>
-                  <a:srgbClr val="6B7280"/>
-                </a:solidFill>
-                <a:latin typeface="Arial"/>
-              </a:rPr>
-              <a:t>10</a:t>
-            </a:r>
-          </a:p>
-        </p:txBody>
-      </p:sp>
-      <p:sp>
-        <p:nvSpPr>
-          <p:cNvPr id="5" name="TextBox 4"/>
-          <p:cNvSpPr txBox="1"/>
-          <p:nvPr/>
-        </p:nvSpPr>
-        <p:spPr>
-          <a:xfrm>
-            <a:off x="2050000" y="1400000"/>
-            <a:ext cx="21000000" cy="1000000"/>
-          </a:xfrm>
-          <a:prstGeom prst="rect">
-            <a:avLst/>
-          </a:prstGeom>
-          <a:noFill/>
-        </p:spPr>
-        <p:txBody>
-          <a:bodyPr wrap="square">
-            <a:spAutoFit/>
-          </a:bodyPr>
-          <a:lstStyle/>
-          <a:p>
-            <a:pPr algn="l"/>
-            <a:r>
-              <a:rPr sz="2600" b="1">
-                <a:solidFill>
-                  <a:srgbClr val="1A1A1A"/>
-                </a:solidFill>
-                <a:latin typeface="Arial"/>
-              </a:rPr>
-              <a:t>ПОРЯДОК № 220н: СОГЛАСИЕ, ПРИОРИТЕТ, АНД</a:t>
-            </a:r>
-          </a:p>
-        </p:txBody>
-      </p:sp>
-      <p:sp>
-        <p:nvSpPr>
-          <p:cNvPr id="6" name="Rectangle 5"/>
-          <p:cNvSpPr/>
-          <p:nvPr/>
-        </p:nvSpPr>
-        <p:spPr>
-          <a:xfrm>
-            <a:off x="2060000" y="2500000"/>
-            <a:ext cx="12000000" cy="70000"/>
-          </a:xfrm>
-          <a:prstGeom prst="rect">
-            <a:avLst/>
-          </a:prstGeom>
-          <a:solidFill>
-            <a:srgbClr val="E30613"/>
-          </a:solidFill>
-          <a:ln>
-            <a:noFill/>
-          </a:ln>
-        </p:spPr>
-        <p:style>
-          <a:lnRef idx="1">
-            <a:schemeClr val="accent1"/>
-          </a:lnRef>
-          <a:fillRef idx="3">
-            <a:schemeClr val="accent1"/>
-          </a:fillRef>
-          <a:effectRef idx="2">
-            <a:schemeClr val="accent1"/>
-          </a:effectRef>
-          <a:fontRef idx="minor">
-            <a:schemeClr val="lt1"/>
-          </a:fontRef>
-        </p:style>
-        <p:txBody>
-          <a:bodyPr rtlCol="0" anchor="ctr"/>
-          <a:lstStyle/>
-          <a:p>
-            <a:pPr algn="ctr"/>
-          </a:p>
-        </p:txBody>
-      </p:sp>
-      <p:sp>
-        <p:nvSpPr>
-          <p:cNvPr id="7" name="TextBox 6"/>
-          <p:cNvSpPr txBox="1"/>
-          <p:nvPr/>
-        </p:nvSpPr>
-        <p:spPr>
-          <a:xfrm>
-            <a:off x="2050000" y="2650000"/>
-            <a:ext cx="18000000" cy="500000"/>
-          </a:xfrm>
-          <a:prstGeom prst="rect">
-            <a:avLst/>
-          </a:prstGeom>
-          <a:noFill/>
-        </p:spPr>
-        <p:txBody>
-          <a:bodyPr wrap="square">
-            <a:spAutoFit/>
-          </a:bodyPr>
-          <a:lstStyle/>
-          <a:p>
-            <a:pPr algn="l"/>
-            <a:r>
-              <a:rPr sz="1400" b="0">
-                <a:solidFill>
-                  <a:srgbClr val="6B7280"/>
-                </a:solidFill>
-                <a:latin typeface="Arial"/>
-              </a:rPr>
-              <a:t>Тема 1 · п. 1  Организация и нормативно-правовая база</a:t>
-            </a:r>
-          </a:p>
-        </p:txBody>
-      </p:sp>
-      <p:sp>
-        <p:nvSpPr>
-          <p:cNvPr id="8" name="Rounded Rectangle 7"/>
-          <p:cNvSpPr/>
-          <p:nvPr/>
-        </p:nvSpPr>
-        <p:spPr>
-          <a:xfrm>
-            <a:off x="2050000" y="3400000"/>
-            <a:ext cx="20000000" cy="8800000"/>
-          </a:xfrm>
-          <a:prstGeom prst="roundRect">
-            <a:avLst/>
-          </a:prstGeom>
-          <a:solidFill>
-            <a:srgbClr val="F7F7F8"/>
-          </a:solidFill>
-          <a:ln>
-            <a:noFill/>
-          </a:ln>
-        </p:spPr>
-        <p:style>
-          <a:lnRef idx="1">
-            <a:schemeClr val="accent1"/>
-          </a:lnRef>
-          <a:fillRef idx="3">
-            <a:schemeClr val="accent1"/>
-          </a:fillRef>
-          <a:effectRef idx="2">
-            <a:schemeClr val="accent1"/>
-          </a:effectRef>
-          <a:fontRef idx="minor">
-            <a:schemeClr val="lt1"/>
-          </a:fontRef>
-        </p:style>
-        <p:txBody>
-          <a:bodyPr rtlCol="0" anchor="ctr"/>
-          <a:lstStyle/>
-          <a:p>
-            <a:pPr algn="ctr"/>
-          </a:p>
-        </p:txBody>
-      </p:sp>
-      <p:sp>
-        <p:nvSpPr>
-          <p:cNvPr id="9" name="TextBox 8"/>
-          <p:cNvSpPr txBox="1"/>
-          <p:nvPr/>
-        </p:nvSpPr>
-        <p:spPr>
-          <a:xfrm>
-            <a:off x="2400000" y="3700000"/>
-            <a:ext cx="19000000" cy="8000000"/>
-          </a:xfrm>
-          <a:prstGeom prst="rect">
-            <a:avLst/>
-          </a:prstGeom>
-          <a:noFill/>
-        </p:spPr>
-        <p:txBody>
-          <a:bodyPr wrap="square">
-            <a:spAutoFit/>
-          </a:bodyPr>
-          <a:lstStyle/>
-          <a:p>
-            <a:pPr>
-              <a:spcAft>
-                <a:spcPts val="600"/>
-              </a:spcAft>
-            </a:pPr>
-            <a:r>
-              <a:rPr sz="1600" b="0">
-                <a:solidFill>
-                  <a:srgbClr val="1A1A1A"/>
-                </a:solidFill>
-                <a:latin typeface="Arial"/>
-              </a:rPr>
-              <a:t>По приказу Минздрава России от 03.05.2024 № 220н (с 01.09.2024):</a:t>
-            </a:r>
-          </a:p>
-          <a:p>
-            <a:pPr>
-              <a:spcAft>
-                <a:spcPts val="600"/>
-              </a:spcAft>
-            </a:pPr>
-            <a:r>
-              <a:rPr sz="1600" b="0">
-                <a:solidFill>
-                  <a:srgbClr val="1A1A1A"/>
-                </a:solidFill>
-                <a:latin typeface="Arial"/>
-              </a:rPr>
-              <a:t/>
-            </a:r>
-          </a:p>
-          <a:p>
-            <a:pPr>
-              <a:spcAft>
-                <a:spcPts val="600"/>
-              </a:spcAft>
-            </a:pPr>
-            <a:r>
-              <a:rPr sz="1600" b="0">
-                <a:solidFill>
-                  <a:srgbClr val="1A1A1A"/>
-                </a:solidFill>
-                <a:latin typeface="Arial"/>
-              </a:rPr>
-              <a:t>• Оказание первой помощи допускается, если отсутствует выраженный до начала</a:t>
-            </a:r>
-          </a:p>
-          <a:p>
-            <a:pPr>
-              <a:spcAft>
-                <a:spcPts val="600"/>
-              </a:spcAft>
-            </a:pPr>
-            <a:r>
-              <a:rPr sz="1600" b="0">
-                <a:solidFill>
-                  <a:srgbClr val="1A1A1A"/>
-                </a:solidFill>
-                <a:latin typeface="Arial"/>
-              </a:rPr>
-              <a:t>  оказания первой помощи отказ гражданина или его законного представителя.</a:t>
-            </a:r>
-          </a:p>
-          <a:p>
-            <a:pPr>
-              <a:spcAft>
-                <a:spcPts val="600"/>
-              </a:spcAft>
-            </a:pPr>
-            <a:r>
-              <a:rPr sz="1600" b="0">
-                <a:solidFill>
-                  <a:srgbClr val="1A1A1A"/>
-                </a:solidFill>
-                <a:latin typeface="Arial"/>
-              </a:rPr>
-              <a:t>• Первая помощь оказывается при условии отсутствия угрожающих жизни и здоровью</a:t>
-            </a:r>
-          </a:p>
-          <a:p>
-            <a:pPr>
-              <a:spcAft>
-                <a:spcPts val="600"/>
-              </a:spcAft>
-            </a:pPr>
-            <a:r>
-              <a:rPr sz="1600" b="0">
-                <a:solidFill>
-                  <a:srgbClr val="1A1A1A"/>
-                </a:solidFill>
-                <a:latin typeface="Arial"/>
-              </a:rPr>
-              <a:t>  оказывающего ее лица факторов.</a:t>
-            </a:r>
-          </a:p>
-          <a:p>
-            <a:pPr>
-              <a:spcAft>
-                <a:spcPts val="600"/>
-              </a:spcAft>
-            </a:pPr>
-            <a:r>
-              <a:rPr sz="1600" b="0">
-                <a:solidFill>
-                  <a:srgbClr val="1A1A1A"/>
-                </a:solidFill>
-                <a:latin typeface="Arial"/>
-              </a:rPr>
-              <a:t>• Первоочередность при двух и более пострадавших — исходя из тяжести состояния;</a:t>
-            </a:r>
-          </a:p>
-          <a:p>
-            <a:pPr>
-              <a:spcAft>
-                <a:spcPts val="600"/>
-              </a:spcAft>
-            </a:pPr>
-            <a:r>
-              <a:rPr sz="1600" b="0">
-                <a:solidFill>
-                  <a:srgbClr val="1A1A1A"/>
-                </a:solidFill>
-                <a:latin typeface="Arial"/>
-              </a:rPr>
-              <a:t>  приоритет должен отдаваться детям (несовершеннолетним).</a:t>
-            </a:r>
-          </a:p>
-          <a:p>
-            <a:pPr>
-              <a:spcAft>
-                <a:spcPts val="600"/>
-              </a:spcAft>
-            </a:pPr>
-            <a:r>
-              <a:rPr sz="1600" b="0">
-                <a:solidFill>
-                  <a:srgbClr val="1A1A1A"/>
-                </a:solidFill>
-                <a:latin typeface="Arial"/>
-              </a:rPr>
-              <a:t>• Разрешено применение автоматических наружных дефибрилляторов (АНД) при наличии.</a:t>
-            </a:r>
-          </a:p>
-          <a:p>
-            <a:pPr>
-              <a:spcAft>
-                <a:spcPts val="600"/>
-              </a:spcAft>
-            </a:pPr>
-            <a:r>
-              <a:rPr sz="1600" b="0">
-                <a:solidFill>
-                  <a:srgbClr val="1A1A1A"/>
-                </a:solidFill>
-                <a:latin typeface="Arial"/>
-              </a:rPr>
-              <a:t>• Может использоваться помощь пострадавшему в принятии лекарственных препаратов,</a:t>
-            </a:r>
-          </a:p>
-          <a:p>
-            <a:pPr>
-              <a:spcAft>
-                <a:spcPts val="600"/>
-              </a:spcAft>
-            </a:pPr>
-            <a:r>
-              <a:rPr sz="1600" b="0">
-                <a:solidFill>
-                  <a:srgbClr val="1A1A1A"/>
-                </a:solidFill>
-                <a:latin typeface="Arial"/>
-              </a:rPr>
-              <a:t>  назначенных врачом; допустимы подручные средства.</a:t>
-            </a:r>
-          </a:p>
-        </p:txBody>
-      </p:sp>
-      <p:sp>
-        <p:nvSpPr>
-          <p:cNvPr id="10" name="TextBox 9"/>
-          <p:cNvSpPr txBox="1"/>
-          <p:nvPr/>
-        </p:nvSpPr>
-        <p:spPr>
-          <a:xfrm>
-            <a:off x="2050000" y="12400000"/>
-            <a:ext cx="20000000" cy="600000"/>
-          </a:xfrm>
-          <a:prstGeom prst="rect">
-            <a:avLst/>
-          </a:prstGeom>
-          <a:noFill/>
-        </p:spPr>
-        <p:txBody>
-          <a:bodyPr wrap="square">
-            <a:spAutoFit/>
-          </a:bodyPr>
-          <a:lstStyle/>
-          <a:p>
-            <a:pPr algn="l"/>
-            <a:r>
-              <a:rPr sz="1100" b="0">
-                <a:solidFill>
-                  <a:srgbClr val="6B7280"/>
-                </a:solidFill>
-                <a:latin typeface="Arial"/>
-              </a:rPr>
-              <a:t>Дополнено по приказу Минздрава № 220н / пособию 2025.</a:t>
-            </a:r>
-          </a:p>
-        </p:txBody>
-      </p:sp>
-    </p:spTree>
-  </p:cSld>
-  <p:clrMapOvr>
-    <a:masterClrMapping/>
-  </p:clrMapOvr>
-</p:sld>
-</file>
-
-<file path=ppt/slides/slide2.xml><?xml version="1.0" encoding="utf-8"?>
-<p:sld xmlns:a="http://schemas.openxmlformats.org/drawingml/2006/main" xmlns:p="http://schemas.openxmlformats.org/presentationml/2006/main" xmlns:r="http://schemas.openxmlformats.org/officeDocument/2006/relationships">
-  <p:cSld>
-    <p:spTree>
-      <p:nvGrpSpPr>
-        <p:cNvPr id="1" name=""/>
-        <p:cNvGrpSpPr/>
-        <p:nvPr/>
-      </p:nvGrpSpPr>
-      <p:grpSpPr/>
-      <p:sp>
-        <p:nvSpPr>
-          <p:cNvPr id="2" name="Rectangle 1"/>
-          <p:cNvSpPr/>
-          <p:nvPr/>
-        </p:nvSpPr>
-        <p:spPr>
-          <a:xfrm>
-            <a:off x="0" y="0"/>
-            <a:ext cx="24384000" cy="13716000"/>
-          </a:xfrm>
-          <a:prstGeom prst="rect">
-            <a:avLst/>
-          </a:prstGeom>
-          <a:solidFill>
-            <a:srgbClr val="FFFFFF"/>
-          </a:solidFill>
-          <a:ln>
-            <a:noFill/>
-          </a:ln>
-        </p:spPr>
-        <p:style>
-          <a:lnRef idx="1">
-            <a:schemeClr val="accent1"/>
-          </a:lnRef>
-          <a:fillRef idx="3">
-            <a:schemeClr val="accent1"/>
-          </a:fillRef>
-          <a:effectRef idx="2">
-            <a:schemeClr val="accent1"/>
-          </a:effectRef>
-          <a:fontRef idx="minor">
-            <a:schemeClr val="lt1"/>
-          </a:fontRef>
-        </p:style>
-        <p:txBody>
-          <a:bodyPr rtlCol="0" anchor="ctr"/>
-          <a:lstStyle/>
-          <a:p>
-            <a:pPr algn="ctr"/>
-          </a:p>
-        </p:txBody>
-      </p:sp>
-      <p:sp>
-        <p:nvSpPr>
-          <p:cNvPr id="3" name="Rectangle 2"/>
-          <p:cNvSpPr/>
-          <p:nvPr/>
-        </p:nvSpPr>
-        <p:spPr>
-          <a:xfrm>
-            <a:off x="0" y="0"/>
-            <a:ext cx="180000" cy="13716000"/>
-          </a:xfrm>
-          <a:prstGeom prst="rect">
-            <a:avLst/>
-          </a:prstGeom>
-          <a:solidFill>
-            <a:srgbClr val="E30613"/>
-          </a:solidFill>
-          <a:ln>
-            <a:noFill/>
-          </a:ln>
-        </p:spPr>
-        <p:style>
-          <a:lnRef idx="1">
-            <a:schemeClr val="accent1"/>
-          </a:lnRef>
-          <a:fillRef idx="3">
-            <a:schemeClr val="accent1"/>
-          </a:fillRef>
-          <a:effectRef idx="2">
-            <a:schemeClr val="accent1"/>
-          </a:effectRef>
-          <a:fontRef idx="minor">
-            <a:schemeClr val="lt1"/>
-          </a:fontRef>
-        </p:style>
-        <p:txBody>
-          <a:bodyPr rtlCol="0" anchor="ctr"/>
-          <a:lstStyle/>
-          <a:p>
-            <a:pPr algn="ctr"/>
-          </a:p>
-        </p:txBody>
-      </p:sp>
-      <p:sp>
-        <p:nvSpPr>
-          <p:cNvPr id="4" name="TextBox 3"/>
-          <p:cNvSpPr txBox="1"/>
-          <p:nvPr/>
-        </p:nvSpPr>
-        <p:spPr>
-          <a:xfrm>
-            <a:off x="220000" y="6540000"/>
-            <a:ext cx="900000" cy="600000"/>
-          </a:xfrm>
-          <a:prstGeom prst="rect">
-            <a:avLst/>
-          </a:prstGeom>
-          <a:noFill/>
-        </p:spPr>
-        <p:txBody>
-          <a:bodyPr wrap="square">
-            <a:spAutoFit/>
-          </a:bodyPr>
-          <a:lstStyle/>
-          <a:p>
-            <a:pPr algn="l"/>
-            <a:r>
-              <a:rPr sz="2200" b="1">
-                <a:solidFill>
-                  <a:srgbClr val="6B7280"/>
-                </a:solidFill>
-                <a:latin typeface="Arial"/>
-              </a:rPr>
-              <a:t>2</a:t>
-            </a:r>
-          </a:p>
-        </p:txBody>
-      </p:sp>
-      <p:sp>
-        <p:nvSpPr>
-          <p:cNvPr id="5" name="TextBox 4"/>
-          <p:cNvSpPr txBox="1"/>
-          <p:nvPr/>
-        </p:nvSpPr>
-        <p:spPr>
-          <a:xfrm>
-            <a:off x="2050000" y="1400000"/>
-            <a:ext cx="21000000" cy="1000000"/>
-          </a:xfrm>
-          <a:prstGeom prst="rect">
-            <a:avLst/>
-          </a:prstGeom>
-          <a:noFill/>
-        </p:spPr>
-        <p:txBody>
-          <a:bodyPr wrap="square">
-            <a:spAutoFit/>
-          </a:bodyPr>
-          <a:lstStyle/>
-          <a:p>
-            <a:pPr algn="l"/>
-            <a:r>
-              <a:rPr sz="2600" b="1">
-                <a:solidFill>
-                  <a:srgbClr val="1A1A1A"/>
-                </a:solidFill>
-                <a:latin typeface="Arial"/>
-              </a:rPr>
-              <a:t>ПЯТЬ КОМПОНЕНТОВ СИСТЕМЫ ПЕРВОЙ ПОМОЩИ</a:t>
-            </a:r>
-          </a:p>
-        </p:txBody>
-      </p:sp>
-      <p:sp>
-        <p:nvSpPr>
-          <p:cNvPr id="6" name="Rectangle 5"/>
-          <p:cNvSpPr/>
-          <p:nvPr/>
-        </p:nvSpPr>
-        <p:spPr>
-          <a:xfrm>
-            <a:off x="2060000" y="2500000"/>
-            <a:ext cx="12000000" cy="70000"/>
-          </a:xfrm>
-          <a:prstGeom prst="rect">
-            <a:avLst/>
-          </a:prstGeom>
-          <a:solidFill>
-            <a:srgbClr val="E30613"/>
-          </a:solidFill>
-          <a:ln>
-            <a:noFill/>
-          </a:ln>
-        </p:spPr>
-        <p:style>
-          <a:lnRef idx="1">
-            <a:schemeClr val="accent1"/>
-          </a:lnRef>
-          <a:fillRef idx="3">
-            <a:schemeClr val="accent1"/>
-          </a:fillRef>
-          <a:effectRef idx="2">
-            <a:schemeClr val="accent1"/>
-          </a:effectRef>
-          <a:fontRef idx="minor">
-            <a:schemeClr val="lt1"/>
-          </a:fontRef>
-        </p:style>
-        <p:txBody>
-          <a:bodyPr rtlCol="0" anchor="ctr"/>
-          <a:lstStyle/>
-          <a:p>
-            <a:pPr algn="ctr"/>
-          </a:p>
-        </p:txBody>
-      </p:sp>
-      <p:sp>
-        <p:nvSpPr>
-          <p:cNvPr id="7" name="TextBox 6"/>
-          <p:cNvSpPr txBox="1"/>
-          <p:nvPr/>
-        </p:nvSpPr>
-        <p:spPr>
-          <a:xfrm>
-            <a:off x="2050000" y="2650000"/>
-            <a:ext cx="18000000" cy="500000"/>
-          </a:xfrm>
-          <a:prstGeom prst="rect">
-            <a:avLst/>
-          </a:prstGeom>
-          <a:noFill/>
-        </p:spPr>
-        <p:txBody>
-          <a:bodyPr wrap="square">
-            <a:spAutoFit/>
-          </a:bodyPr>
-          <a:lstStyle/>
-          <a:p>
-            <a:pPr algn="l"/>
-            <a:r>
-              <a:rPr sz="1400" b="0">
-                <a:solidFill>
-                  <a:srgbClr val="6B7280"/>
-                </a:solidFill>
-                <a:latin typeface="Arial"/>
-              </a:rPr>
-              <a:t>Тема 1 · п. 1  Организация и нормативно-правовая база</a:t>
-            </a:r>
-          </a:p>
-        </p:txBody>
-      </p:sp>
-      <p:sp>
-        <p:nvSpPr>
-          <p:cNvPr id="8" name="Rounded Rectangle 7"/>
-          <p:cNvSpPr/>
-          <p:nvPr/>
-        </p:nvSpPr>
-        <p:spPr>
-          <a:xfrm>
-            <a:off x="2050000" y="3400000"/>
-            <a:ext cx="20000000" cy="8800000"/>
-          </a:xfrm>
-          <a:prstGeom prst="roundRect">
-            <a:avLst/>
-          </a:prstGeom>
-          <a:solidFill>
-            <a:srgbClr val="F7F7F8"/>
-          </a:solidFill>
-          <a:ln>
-            <a:noFill/>
-          </a:ln>
-        </p:spPr>
-        <p:style>
-          <a:lnRef idx="1">
-            <a:schemeClr val="accent1"/>
-          </a:lnRef>
-          <a:fillRef idx="3">
-            <a:schemeClr val="accent1"/>
-          </a:fillRef>
-          <a:effectRef idx="2">
-            <a:schemeClr val="accent1"/>
-          </a:effectRef>
-          <a:fontRef idx="minor">
-            <a:schemeClr val="lt1"/>
-          </a:fontRef>
-        </p:style>
-        <p:txBody>
-          <a:bodyPr rtlCol="0" anchor="ctr"/>
-          <a:lstStyle/>
-          <a:p>
-            <a:pPr algn="ctr"/>
-          </a:p>
-        </p:txBody>
-      </p:sp>
-      <p:sp>
-        <p:nvSpPr>
-          <p:cNvPr id="9" name="TextBox 8"/>
-          <p:cNvSpPr txBox="1"/>
-          <p:nvPr/>
-        </p:nvSpPr>
-        <p:spPr>
-          <a:xfrm>
-            <a:off x="2400000" y="3700000"/>
-            <a:ext cx="19000000" cy="8000000"/>
-          </a:xfrm>
-          <a:prstGeom prst="rect">
-            <a:avLst/>
-          </a:prstGeom>
-          <a:noFill/>
-        </p:spPr>
-        <p:txBody>
-          <a:bodyPr wrap="square">
-            <a:spAutoFit/>
-          </a:bodyPr>
-          <a:lstStyle/>
-          <a:p>
-            <a:pPr>
-              <a:spcAft>
-                <a:spcPts val="600"/>
-              </a:spcAft>
-            </a:pPr>
-            <a:r>
-              <a:rPr sz="1600" b="0">
-                <a:solidFill>
-                  <a:srgbClr val="1A1A1A"/>
-                </a:solidFill>
-                <a:latin typeface="Arial"/>
-              </a:rPr>
-              <a:t>По учебному пособию Минздрава (2025) система оказания первой помощи в РФ</a:t>
-            </a:r>
-          </a:p>
-          <a:p>
-            <a:pPr>
-              <a:spcAft>
-                <a:spcPts val="600"/>
-              </a:spcAft>
-            </a:pPr>
-            <a:r>
-              <a:rPr sz="1600" b="0">
-                <a:solidFill>
-                  <a:srgbClr val="1A1A1A"/>
-                </a:solidFill>
-                <a:latin typeface="Arial"/>
-              </a:rPr>
-              <a:t>состоит из пяти основных компонентов (ранее в презентации указывали три):</a:t>
-            </a:r>
-          </a:p>
-          <a:p>
-            <a:pPr>
-              <a:spcAft>
-                <a:spcPts val="600"/>
-              </a:spcAft>
-            </a:pPr>
-            <a:r>
-              <a:rPr sz="1600" b="0">
-                <a:solidFill>
-                  <a:srgbClr val="1A1A1A"/>
-                </a:solidFill>
-                <a:latin typeface="Arial"/>
-              </a:rPr>
-              <a:t/>
-            </a:r>
-          </a:p>
-          <a:p>
-            <a:pPr>
-              <a:spcAft>
-                <a:spcPts val="600"/>
-              </a:spcAft>
-            </a:pPr>
-            <a:r>
-              <a:rPr sz="1600" b="0">
-                <a:solidFill>
-                  <a:srgbClr val="1A1A1A"/>
-                </a:solidFill>
-                <a:latin typeface="Arial"/>
-              </a:rPr>
-              <a:t>1. Организация и нормативно-правовое обеспечение.</a:t>
-            </a:r>
-          </a:p>
-          <a:p>
-            <a:pPr>
-              <a:spcAft>
-                <a:spcPts val="600"/>
-              </a:spcAft>
-            </a:pPr>
-            <a:r>
-              <a:rPr sz="1600" b="0">
-                <a:solidFill>
-                  <a:srgbClr val="1A1A1A"/>
-                </a:solidFill>
-                <a:latin typeface="Arial"/>
-              </a:rPr>
-              <a:t>2. Обучение участников оказания первой помощи правилам и навыкам ее оказания.</a:t>
-            </a:r>
-          </a:p>
-          <a:p>
-            <a:pPr>
-              <a:spcAft>
-                <a:spcPts val="600"/>
-              </a:spcAft>
-            </a:pPr>
-            <a:r>
-              <a:rPr sz="1600" b="0">
-                <a:solidFill>
-                  <a:srgbClr val="1A1A1A"/>
-                </a:solidFill>
-                <a:latin typeface="Arial"/>
-              </a:rPr>
-              <a:t>3. Оснащение участников средствами для ее оказания (аптечками, укладками, наборами, комплектами).</a:t>
-            </a:r>
-          </a:p>
-          <a:p>
-            <a:pPr>
-              <a:spcAft>
-                <a:spcPts val="600"/>
-              </a:spcAft>
-            </a:pPr>
-            <a:r>
-              <a:rPr sz="1600" b="0">
-                <a:solidFill>
-                  <a:srgbClr val="1A1A1A"/>
-                </a:solidFill>
-                <a:latin typeface="Arial"/>
-              </a:rPr>
-              <a:t>4. Мотивирование на обучение и оказание первой помощи.</a:t>
-            </a:r>
-          </a:p>
-          <a:p>
-            <a:pPr>
-              <a:spcAft>
-                <a:spcPts val="600"/>
-              </a:spcAft>
-            </a:pPr>
-            <a:r>
-              <a:rPr sz="1600" b="0">
-                <a:solidFill>
-                  <a:srgbClr val="1A1A1A"/>
-                </a:solidFill>
-                <a:latin typeface="Arial"/>
-              </a:rPr>
-              <a:t>5. Учет и анализ эффективности оказания первой помощи.</a:t>
-            </a:r>
-          </a:p>
-        </p:txBody>
-      </p:sp>
-      <p:sp>
-        <p:nvSpPr>
-          <p:cNvPr id="10" name="TextBox 9"/>
-          <p:cNvSpPr txBox="1"/>
-          <p:nvPr/>
-        </p:nvSpPr>
-        <p:spPr>
-          <a:xfrm>
-            <a:off x="2050000" y="12400000"/>
-            <a:ext cx="20000000" cy="600000"/>
-          </a:xfrm>
-          <a:prstGeom prst="rect">
-            <a:avLst/>
-          </a:prstGeom>
-          <a:noFill/>
-        </p:spPr>
-        <p:txBody>
-          <a:bodyPr wrap="square">
-            <a:spAutoFit/>
-          </a:bodyPr>
-          <a:lstStyle/>
-          <a:p>
-            <a:pPr algn="l"/>
-            <a:r>
-              <a:rPr sz="1100" b="0">
-                <a:solidFill>
-                  <a:srgbClr val="6B7280"/>
-                </a:solidFill>
-                <a:latin typeface="Arial"/>
-              </a:rPr>
-              <a:t>Дополнено по учебному пособию Минздрава, 2025.</a:t>
-            </a:r>
-          </a:p>
-        </p:txBody>
-      </p:sp>
-    </p:spTree>
-  </p:cSld>
-  <p:clrMapOvr>
-    <a:masterClrMapping/>
-  </p:clrMapOvr>
-</p:sld>
-</file>
-
-<file path=ppt/slides/slide3.xml><?xml version="1.0" encoding="utf-8"?>
-<p:sld xmlns:a="http://schemas.openxmlformats.org/drawingml/2006/main" xmlns:r="http://schemas.openxmlformats.org/officeDocument/2006/relationships" xmlns:p="http://schemas.openxmlformats.org/presentationml/2006/main" showMasterPhAnim="0">
-  <p:cSld>
-    <p:spTree>
-      <p:nvGrpSpPr>
-        <p:cNvPr id="1" name=""/>
-        <p:cNvGrpSpPr/>
-        <p:nvPr/>
-      </p:nvGrpSpPr>
-      <p:grpSpPr bwMode="auto">
-        <a:xfrm>
-          <a:off x="0" y="0"/>
-          <a:ext cx="0" cy="0"/>
-          <a:chOff x="0" y="0"/>
-          <a:chExt cx="0" cy="0"/>
-        </a:xfrm>
-      </p:grpSpPr>
-      <p:sp>
-        <p:nvSpPr>
           <p:cNvPr id="866" name="Номер слайда"/>
           <p:cNvSpPr txBox="1">
             <a:spLocks noGrp="1"/>
@@ -44698,7 +43681,10 @@
               <a:t/>
             </a:fld>
             <a:r>
-              <a:t>3</a:t>
+              <a:rPr>
+                <a:solidFill/>
+              </a:rPr>
+              <a:t>10</a:t>
             </a:r>
             <a:endParaRPr kern="0">
               <a:latin typeface="Open Sans Light"/>
@@ -44748,7 +43734,7 @@
               <a:defRPr/>
             </a:pPr>
             <a:r>
-              <a:rPr lang="ru-RU" sz="4600" dirty="0">
+              <a:rPr lang="ru-RU" sz="4600" dirty="0" b="0">
                 <a:solidFill>
                   <a:srgbClr val="404040"/>
                 </a:solidFill>
@@ -44757,7 +43743,7 @@
                 <a:cs typeface="PFDinDisplayPro-Regular"/>
                 <a:sym typeface="Stem"/>
               </a:rPr>
-              <a:t>ПОНЯТИЕ ПЕРВОЙ ПОМОЩИ</a:t>
+              <a:t>ПОРЯДОК № 220н: СОГЛАСИЕ, ПРИОРИТЕТ, АНД</a:t>
             </a:r>
           </a:p>
         </p:txBody>
@@ -45064,41 +44050,18 @@
               <a:defRPr/>
             </a:pPr>
             <a:r>
-              <a:rPr lang="ru-RU"/>
+              <a:rPr lang="ru-RU" sz="2800" b="0">
+                <a:solidFill>
+                  <a:srgbClr val="535353"/>
+                </a:solidFill>
+                <a:latin typeface="Open Sans"/>
+              </a:rPr>
               <a:t>Тема 1 · п. 1  Организация и нормативно-правовая база</a:t>
             </a:r>
             <a:endParaRPr lang="ru-RU" dirty="0"/>
           </a:p>
         </p:txBody>
       </p:sp>
-      <p:pic>
-        <p:nvPicPr>
-          <p:cNvPr id="10" name="Picture 5"/>
-          <p:cNvPicPr>
-            <a:picLocks noChangeAspect="1" noChangeArrowheads="1"/>
-          </p:cNvPicPr>
-          <p:nvPr/>
-        </p:nvPicPr>
-        <p:blipFill>
-          <a:blip r:embed="rId2"/>
-          <a:srcRect t="11351"/>
-          <a:stretch/>
-        </p:blipFill>
-        <p:spPr bwMode="auto">
-          <a:xfrm>
-            <a:off x="1833400" y="7232303"/>
-            <a:ext cx="2727076" cy="5808806"/>
-          </a:xfrm>
-          <a:prstGeom prst="rect">
-            <a:avLst/>
-          </a:prstGeom>
-          <a:noFill/>
-          <a:ln>
-            <a:noFill/>
-          </a:ln>
-          <a:effectLst/>
-        </p:spPr>
-      </p:pic>
       <p:sp>
         <p:nvSpPr>
           <p:cNvPr id="11" name="Овальная выноска 4"/>
@@ -45107,8 +44070,8 @@
         </p:nvSpPr>
         <p:spPr bwMode="auto">
           <a:xfrm>
-            <a:off x="3875079" y="3861098"/>
-            <a:ext cx="7589738" cy="4258675"/>
+            <a:off x="2061252" y="3600000"/>
+            <a:ext cx="20000000" cy="9000000"/>
           </a:xfrm>
           <a:prstGeom prst="wedgeEllipseCallout">
             <a:avLst>
@@ -45144,12 +44107,1298 @@
             </a:pPr>
             <a:r>
               <a:rPr lang="ru-RU" sz="2800" b="1">
+                <a:solidFill>
+                  <a:srgbClr val="404040"/>
+                </a:solidFill>
+                <a:latin typeface="Open Sans"/>
+                <a:cs typeface="Calibri"/>
+              </a:rPr>
+              <a:t>По приказу Минздрава России от 03.05.2024 № 220н (с 01.09.2024):</a:t>
+            </a:r>
+            <a:endParaRPr/>
+          </a:p>
+          <a:p>
+            <a:pPr defTabSz="914400">
+              <a:defRPr/>
+            </a:pPr>
+            <a:r>
+              <a:rPr lang="ru-RU" sz="2800" b="1">
+                <a:solidFill>
+                  <a:srgbClr val="404040"/>
+                </a:solidFill>
+                <a:latin typeface="Open Sans"/>
+                <a:cs typeface="Calibri"/>
+              </a:rPr>
+              <a:t> </a:t>
+            </a:r>
+            <a:endParaRPr/>
+          </a:p>
+          <a:p>
+            <a:pPr defTabSz="914400">
+              <a:defRPr/>
+            </a:pPr>
+            <a:r>
+              <a:rPr lang="ru-RU" sz="2800" b="1">
+                <a:solidFill>
+                  <a:srgbClr val="404040"/>
+                </a:solidFill>
+                <a:latin typeface="Open Sans"/>
+                <a:cs typeface="Calibri"/>
+              </a:rPr>
+              <a:t>• Оказание первой помощи допускается, если отсутствует выраженный до начала оказания первой помощи отказ гражданина или его законного представителя.</a:t>
+            </a:r>
+            <a:endParaRPr/>
+          </a:p>
+          <a:p>
+            <a:pPr defTabSz="914400">
+              <a:defRPr/>
+            </a:pPr>
+            <a:r>
+              <a:rPr lang="ru-RU" sz="2800" b="1">
+                <a:solidFill>
+                  <a:srgbClr val="404040"/>
+                </a:solidFill>
+                <a:latin typeface="Open Sans"/>
+                <a:cs typeface="Calibri"/>
+              </a:rPr>
+              <a:t>• Первая помощь оказывается при условии отсутствия угрожающих жизни и здоровью оказывающего ее лица факторов.</a:t>
+            </a:r>
+            <a:endParaRPr/>
+          </a:p>
+          <a:p>
+            <a:pPr defTabSz="914400">
+              <a:defRPr/>
+            </a:pPr>
+            <a:r>
+              <a:rPr lang="ru-RU" sz="2800" b="1">
+                <a:solidFill>
+                  <a:srgbClr val="404040"/>
+                </a:solidFill>
+                <a:latin typeface="Open Sans"/>
+                <a:cs typeface="Calibri"/>
+              </a:rPr>
+              <a:t>• При двух и более пострадавших первоочередность — по тяжести состояния; приоритет отдаётся детям (несовершеннолетним).</a:t>
+            </a:r>
+            <a:endParaRPr/>
+          </a:p>
+          <a:p>
+            <a:pPr defTabSz="914400">
+              <a:defRPr/>
+            </a:pPr>
+            <a:r>
+              <a:rPr lang="ru-RU" sz="2800" b="1">
+                <a:solidFill>
+                  <a:srgbClr val="404040"/>
+                </a:solidFill>
+                <a:latin typeface="Open Sans"/>
+                <a:cs typeface="Calibri"/>
+              </a:rPr>
+              <a:t>• Разрешено применение автоматических наружных дефибрилляторов (АНД) при наличии.</a:t>
+            </a:r>
+            <a:endParaRPr/>
+          </a:p>
+          <a:p>
+            <a:pPr defTabSz="914400">
+              <a:defRPr/>
+            </a:pPr>
+            <a:r>
+              <a:rPr lang="ru-RU" sz="2800" b="1">
+                <a:solidFill>
+                  <a:srgbClr val="404040"/>
+                </a:solidFill>
+                <a:latin typeface="Open Sans"/>
+                <a:cs typeface="Calibri"/>
+              </a:rPr>
+              <a:t>• Допускается помощь пострадавшему в принятии лекарственных препаратов, назначенных врачом; могут использоваться подручные средства.</a:t>
+            </a:r>
+            <a:endParaRPr/>
+          </a:p>
+        </p:txBody>
+      </p:sp>
+    </p:spTree>
+  </p:cSld>
+  <p:clrMapOvr>
+    <a:masterClrMapping/>
+  </p:clrMapOvr>
+</p:sld>
+</file>
+
+<file path=ppt/slides/slide2.xml><?xml version="1.0" encoding="utf-8"?>
+<p:sld xmlns:a="http://schemas.openxmlformats.org/drawingml/2006/main" xmlns:p="http://schemas.openxmlformats.org/presentationml/2006/main" xmlns:r="http://schemas.openxmlformats.org/officeDocument/2006/relationships">
+  <p:cSld>
+    <p:spTree>
+      <p:nvGrpSpPr>
+        <p:cNvPr id="1" name=""/>
+        <p:cNvGrpSpPr/>
+        <p:nvPr/>
+      </p:nvGrpSpPr>
+      <p:grpSpPr/>
+      <p:sp>
+        <p:nvSpPr>
+          <p:cNvPr id="866" name="Номер слайда"/>
+          <p:cNvSpPr txBox="1">
+            <a:spLocks noGrp="1"/>
+          </p:cNvSpPr>
+          <p:nvPr>
+            <p:ph type="sldNum" sz="quarter" idx="4294967295"/>
+          </p:nvPr>
+        </p:nvSpPr>
+        <p:spPr bwMode="auto">
+          <a:xfrm>
+            <a:off x="6350" y="6538852"/>
+            <a:ext cx="684000" cy="638316"/>
+          </a:xfrm>
+          <a:prstGeom prst="rect">
+            <a:avLst/>
+          </a:prstGeom>
+          <a:gradFill>
+            <a:gsLst>
+              <a:gs pos="0">
+                <a:srgbClr val="656565"/>
+              </a:gs>
+              <a:gs pos="50000">
+                <a:schemeClr val="accent6"/>
+              </a:gs>
+              <a:gs pos="100000">
+                <a:srgbClr val="444444"/>
+              </a:gs>
+            </a:gsLst>
+            <a:lin ang="5400000" scaled="1"/>
+          </a:gradFill>
+          <a:ln w="6350">
+            <a:solidFill>
+              <a:srgbClr val="DDDDDD"/>
+            </a:solidFill>
+            <a:miter lim="800000"/>
+          </a:ln>
+          <a:effectLst>
+            <a:outerShdw blurRad="63500" dist="19050" dir="5400000" rotWithShape="0">
+              <a:srgbClr val="000000">
+                <a:alpha val="63000"/>
+              </a:srgbClr>
+            </a:outerShdw>
+          </a:effectLst>
+        </p:spPr>
+        <p:txBody>
+          <a:bodyPr wrap="square"/>
+          <a:lstStyle>
+            <a:lvl1pPr>
+              <a:defRPr sz="3500">
+                <a:solidFill>
+                  <a:srgbClr val="FFFFFF"/>
+                </a:solidFill>
+              </a:defRPr>
+            </a:lvl1pPr>
+          </a:lstStyle>
+          <a:p>
+            <a:pPr algn="ctr" defTabSz="1828434">
+              <a:defRPr/>
+            </a:pPr>
+            <a:fld id="{86CB4B4D-7CA3-9044-876B-883B54F8677D}" type="slidenum">
+              <a:rPr kern="0">
+                <a:latin typeface="Open Sans Light"/>
+                <a:ea typeface="Open Sans"/>
+                <a:cs typeface="Calibri"/>
+                <a:sym typeface="Open Sans"/>
+              </a:rPr>
+              <a:pPr algn="ctr" defTabSz="1828434">
+                <a:defRPr/>
+              </a:pPr>
+              <a:t/>
+            </a:fld>
+            <a:r>
+              <a:rPr>
+                <a:solidFill/>
+              </a:rPr>
+              <a:t>2</a:t>
+            </a:r>
+            <a:endParaRPr kern="0">
+              <a:latin typeface="Open Sans Light"/>
+              <a:ea typeface="Open Sans"/>
+              <a:cs typeface="Calibri"/>
+              <a:sym typeface="Open Sans"/>
+            </a:endParaRPr>
+          </a:p>
+        </p:txBody>
+      </p:sp>
+      <p:sp>
+        <p:nvSpPr>
+          <p:cNvPr id="29" name="TextBox 6"/>
+          <p:cNvSpPr txBox="1"/>
+          <p:nvPr/>
+        </p:nvSpPr>
+        <p:spPr bwMode="auto">
+          <a:xfrm>
+            <a:off x="2061252" y="1845677"/>
+            <a:ext cx="24280504" cy="832087"/>
+          </a:xfrm>
+          <a:prstGeom prst="rect">
+            <a:avLst/>
+          </a:prstGeom>
+          <a:ln w="12700">
+            <a:miter lim="400000"/>
+          </a:ln>
+        </p:spPr>
+        <p:txBody>
+          <a:bodyPr wrap="square" lIns="45720" rIns="45720">
+            <a:spAutoFit/>
+          </a:bodyPr>
+          <a:lstStyle>
+            <a:lvl1pPr>
+              <a:defRPr sz="6600">
+                <a:solidFill>
+                  <a:srgbClr val="010101"/>
+                </a:solidFill>
+                <a:latin typeface="Montserrat Semi Bold"/>
+                <a:ea typeface="Montserrat Semi Bold"/>
+                <a:cs typeface="Montserrat Semi Bold"/>
+              </a:defRPr>
+            </a:lvl1pPr>
+          </a:lstStyle>
+          <a:p>
+            <a:pPr defTabSz="914400">
+              <a:defRPr/>
+            </a:pPr>
+            <a:r>
+              <a:rPr lang="ru-RU" sz="4600" dirty="0" b="0">
+                <a:solidFill>
+                  <a:srgbClr val="404040"/>
+                </a:solidFill>
+                <a:latin typeface="PFDinDisplayPro-Regular"/>
+                <a:ea typeface="PFDinDisplayPro-Regular"/>
+                <a:cs typeface="PFDinDisplayPro-Regular"/>
+                <a:sym typeface="Stem"/>
+              </a:rPr>
+              <a:t>ПЯТЬ КОМПОНЕНТОВ СИСТЕМЫ ПЕРВОЙ ПОМОЩИ</a:t>
+            </a:r>
+          </a:p>
+        </p:txBody>
+      </p:sp>
+      <p:sp>
+        <p:nvSpPr>
+          <p:cNvPr id="22" name="Rectangle 29"/>
+          <p:cNvSpPr/>
+          <p:nvPr/>
+        </p:nvSpPr>
+        <p:spPr bwMode="auto">
+          <a:xfrm>
+            <a:off x="2061258" y="2604670"/>
+            <a:ext cx="8596884" cy="72000"/>
+          </a:xfrm>
+          <a:prstGeom prst="rect">
+            <a:avLst/>
+          </a:prstGeom>
+          <a:gradFill>
+            <a:gsLst>
+              <a:gs pos="0">
+                <a:srgbClr val="656565"/>
+              </a:gs>
+              <a:gs pos="50000">
+                <a:schemeClr val="accent6"/>
+              </a:gs>
+              <a:gs pos="100000">
+                <a:srgbClr val="444444"/>
+              </a:gs>
+            </a:gsLst>
+            <a:lin ang="5400000" scaled="1"/>
+          </a:gradFill>
+          <a:ln w="6350">
+            <a:solidFill>
+              <a:srgbClr val="DDDDDD"/>
+            </a:solidFill>
+            <a:miter/>
+          </a:ln>
+          <a:effectLst>
+            <a:outerShdw blurRad="63500" dist="19050" dir="5400000" rotWithShape="0">
+              <a:srgbClr val="000000">
+                <a:alpha val="63000"/>
+              </a:srgbClr>
+            </a:outerShdw>
+          </a:effectLst>
+        </p:spPr>
+        <p:txBody>
+          <a:bodyPr lIns="45720" rIns="45720" anchor="ctr"/>
+          <a:lstStyle/>
+          <a:p>
+            <a:pPr defTabSz="1828434">
+              <a:defRPr>
+                <a:solidFill>
+                  <a:srgbClr val="FFFFFF"/>
+                </a:solidFill>
+              </a:defRPr>
+            </a:pPr>
+            <a:endParaRPr sz="3500">
+              <a:solidFill>
+                <a:srgbClr val="FFFFFF"/>
+              </a:solidFill>
+              <a:latin typeface="Open Sans Light"/>
+              <a:cs typeface="Calibri"/>
+              <a:sym typeface="Open Sans"/>
+            </a:endParaRPr>
+          </a:p>
+        </p:txBody>
+      </p:sp>
+      <p:sp>
+        <p:nvSpPr>
+          <p:cNvPr id="5" name="Подзаголовок 2"/>
+          <p:cNvSpPr txBox="1">
+            <a:spLocks/>
+          </p:cNvSpPr>
+          <p:nvPr/>
+        </p:nvSpPr>
+        <p:spPr bwMode="auto">
+          <a:xfrm>
+            <a:off x="2055994" y="2753858"/>
+            <a:ext cx="6408712" cy="681808"/>
+          </a:xfrm>
+          <a:prstGeom prst="rect">
+            <a:avLst/>
+          </a:prstGeom>
+          <a:ln w="25400">
+            <a:miter lim="400000"/>
+          </a:ln>
+        </p:spPr>
+        <p:txBody>
+          <a:bodyPr tIns="91440" bIns="91440" anchor="ctr">
+            <a:normAutofit/>
+          </a:bodyPr>
+          <a:lstStyle>
+            <a:lvl1pPr marL="0" marR="0" indent="0" algn="r" defTabSz="1828800">
+              <a:lnSpc>
+                <a:spcPct val="110000"/>
+              </a:lnSpc>
+              <a:spcBef>
+                <a:spcPts val="0"/>
+              </a:spcBef>
+              <a:spcAft>
+                <a:spcPts val="0"/>
+              </a:spcAft>
+              <a:buClrTx/>
+              <a:buSzTx/>
+              <a:buFontTx/>
+              <a:buNone/>
+              <a:defRPr sz="2800" b="0" i="0" u="none" strike="noStrike" cap="none" spc="0">
+                <a:solidFill>
+                  <a:srgbClr val="535353"/>
+                </a:solidFill>
+                <a:latin typeface="Open Sans"/>
+                <a:ea typeface="Open Sans"/>
+                <a:cs typeface="Open Sans"/>
+              </a:defRPr>
+            </a:lvl1pPr>
+            <a:lvl2pPr marL="0" marR="0" indent="457200" algn="l" defTabSz="1828800">
+              <a:lnSpc>
+                <a:spcPct val="110000"/>
+              </a:lnSpc>
+              <a:spcBef>
+                <a:spcPts val="0"/>
+              </a:spcBef>
+              <a:spcAft>
+                <a:spcPts val="0"/>
+              </a:spcAft>
+              <a:buClrTx/>
+              <a:buSzTx/>
+              <a:buFontTx/>
+              <a:buNone/>
+              <a:defRPr sz="2400" b="0" i="0" u="none" strike="noStrike" cap="none" spc="0">
+                <a:solidFill>
+                  <a:srgbClr val="535353"/>
+                </a:solidFill>
+                <a:latin typeface="Open Sans"/>
+                <a:ea typeface="Open Sans"/>
+                <a:cs typeface="Open Sans"/>
+              </a:defRPr>
+            </a:lvl2pPr>
+            <a:lvl3pPr marL="0" marR="0" indent="914400" algn="l" defTabSz="1828800">
+              <a:lnSpc>
+                <a:spcPct val="110000"/>
+              </a:lnSpc>
+              <a:spcBef>
+                <a:spcPts val="0"/>
+              </a:spcBef>
+              <a:spcAft>
+                <a:spcPts val="0"/>
+              </a:spcAft>
+              <a:buClrTx/>
+              <a:buSzTx/>
+              <a:buFontTx/>
+              <a:buNone/>
+              <a:defRPr sz="2400" b="0" i="0" u="none" strike="noStrike" cap="none" spc="0">
+                <a:solidFill>
+                  <a:srgbClr val="535353"/>
+                </a:solidFill>
+                <a:latin typeface="Open Sans"/>
+                <a:ea typeface="Open Sans"/>
+                <a:cs typeface="Open Sans"/>
+              </a:defRPr>
+            </a:lvl3pPr>
+            <a:lvl4pPr marL="0" marR="0" indent="1371600" algn="l" defTabSz="1828800">
+              <a:lnSpc>
+                <a:spcPct val="110000"/>
+              </a:lnSpc>
+              <a:spcBef>
+                <a:spcPts val="0"/>
+              </a:spcBef>
+              <a:spcAft>
+                <a:spcPts val="0"/>
+              </a:spcAft>
+              <a:buClrTx/>
+              <a:buSzTx/>
+              <a:buFontTx/>
+              <a:buNone/>
+              <a:defRPr sz="2400" b="0" i="0" u="none" strike="noStrike" cap="none" spc="0">
+                <a:solidFill>
+                  <a:srgbClr val="535353"/>
+                </a:solidFill>
+                <a:latin typeface="Open Sans"/>
+                <a:ea typeface="Open Sans"/>
+                <a:cs typeface="Open Sans"/>
+              </a:defRPr>
+            </a:lvl4pPr>
+            <a:lvl5pPr marL="0" marR="0" indent="1828800" algn="l" defTabSz="1828800">
+              <a:lnSpc>
+                <a:spcPct val="110000"/>
+              </a:lnSpc>
+              <a:spcBef>
+                <a:spcPts val="0"/>
+              </a:spcBef>
+              <a:spcAft>
+                <a:spcPts val="0"/>
+              </a:spcAft>
+              <a:buClrTx/>
+              <a:buSzTx/>
+              <a:buFontTx/>
+              <a:buNone/>
+              <a:defRPr sz="2400" b="0" i="0" u="none" strike="noStrike" cap="none" spc="0">
+                <a:solidFill>
+                  <a:srgbClr val="535353"/>
+                </a:solidFill>
+                <a:latin typeface="Open Sans"/>
+                <a:ea typeface="Open Sans"/>
+                <a:cs typeface="Open Sans"/>
+              </a:defRPr>
+            </a:lvl5pPr>
+            <a:lvl6pPr marL="0" marR="0" indent="2286000" algn="l" defTabSz="1828800">
+              <a:lnSpc>
+                <a:spcPct val="110000"/>
+              </a:lnSpc>
+              <a:spcBef>
+                <a:spcPts val="0"/>
+              </a:spcBef>
+              <a:spcAft>
+                <a:spcPts val="0"/>
+              </a:spcAft>
+              <a:buClrTx/>
+              <a:buSzTx/>
+              <a:buFontTx/>
+              <a:buNone/>
+              <a:defRPr sz="2400" b="0" i="0" u="none" strike="noStrike" cap="none" spc="0">
+                <a:solidFill>
+                  <a:srgbClr val="0082B9"/>
+                </a:solidFill>
+                <a:latin typeface="Open Sans"/>
+                <a:ea typeface="Open Sans"/>
+                <a:cs typeface="Open Sans"/>
+              </a:defRPr>
+            </a:lvl6pPr>
+            <a:lvl7pPr marL="0" marR="0" indent="2743200" algn="l" defTabSz="1828800">
+              <a:lnSpc>
+                <a:spcPct val="110000"/>
+              </a:lnSpc>
+              <a:spcBef>
+                <a:spcPts val="0"/>
+              </a:spcBef>
+              <a:spcAft>
+                <a:spcPts val="0"/>
+              </a:spcAft>
+              <a:buClrTx/>
+              <a:buSzTx/>
+              <a:buFontTx/>
+              <a:buNone/>
+              <a:defRPr sz="2400" b="0" i="0" u="none" strike="noStrike" cap="none" spc="0">
+                <a:solidFill>
+                  <a:srgbClr val="0082B9"/>
+                </a:solidFill>
+                <a:latin typeface="Open Sans"/>
+                <a:ea typeface="Open Sans"/>
+                <a:cs typeface="Open Sans"/>
+              </a:defRPr>
+            </a:lvl7pPr>
+            <a:lvl8pPr marL="0" marR="0" indent="3200400" algn="l" defTabSz="1828800">
+              <a:lnSpc>
+                <a:spcPct val="110000"/>
+              </a:lnSpc>
+              <a:spcBef>
+                <a:spcPts val="0"/>
+              </a:spcBef>
+              <a:spcAft>
+                <a:spcPts val="0"/>
+              </a:spcAft>
+              <a:buClrTx/>
+              <a:buSzTx/>
+              <a:buFontTx/>
+              <a:buNone/>
+              <a:defRPr sz="2400" b="0" i="0" u="none" strike="noStrike" cap="none" spc="0">
+                <a:solidFill>
+                  <a:srgbClr val="0082B9"/>
+                </a:solidFill>
+                <a:latin typeface="Open Sans"/>
+                <a:ea typeface="Open Sans"/>
+                <a:cs typeface="Open Sans"/>
+              </a:defRPr>
+            </a:lvl8pPr>
+            <a:lvl9pPr marL="0" marR="0" indent="3657600" algn="l" defTabSz="1828800">
+              <a:lnSpc>
+                <a:spcPct val="110000"/>
+              </a:lnSpc>
+              <a:spcBef>
+                <a:spcPts val="0"/>
+              </a:spcBef>
+              <a:spcAft>
+                <a:spcPts val="0"/>
+              </a:spcAft>
+              <a:buClrTx/>
+              <a:buSzTx/>
+              <a:buFontTx/>
+              <a:buNone/>
+              <a:defRPr sz="2400" b="0" i="0" u="none" strike="noStrike" cap="none" spc="0">
+                <a:solidFill>
+                  <a:srgbClr val="0082B9"/>
+                </a:solidFill>
+                <a:latin typeface="Open Sans"/>
+                <a:ea typeface="Open Sans"/>
+                <a:cs typeface="Open Sans"/>
+              </a:defRPr>
+            </a:lvl9pPr>
+          </a:lstStyle>
+          <a:p>
+            <a:pPr>
+              <a:defRPr/>
+            </a:pPr>
+            <a:r>
+              <a:rPr lang="ru-RU" sz="2800" b="0">
+                <a:solidFill>
+                  <a:srgbClr val="535353"/>
+                </a:solidFill>
+                <a:latin typeface="Open Sans"/>
+              </a:rPr>
+              <a:t>Тема 1 · п. 1  Организация и нормативно-правовая база</a:t>
+            </a:r>
+            <a:endParaRPr lang="ru-RU" dirty="0"/>
+          </a:p>
+        </p:txBody>
+      </p:sp>
+      <p:sp>
+        <p:nvSpPr>
+          <p:cNvPr id="11" name="Овальная выноска 4"/>
+          <p:cNvSpPr/>
+          <p:nvPr/>
+        </p:nvSpPr>
+        <p:spPr bwMode="auto">
+          <a:xfrm>
+            <a:off x="2061252" y="3600000"/>
+            <a:ext cx="20000000" cy="9000000"/>
+          </a:xfrm>
+          <a:prstGeom prst="wedgeEllipseCallout">
+            <a:avLst>
+              <a:gd name="adj1" fmla="val -53192"/>
+              <a:gd name="adj2" fmla="val 46931"/>
+            </a:avLst>
+          </a:prstGeom>
+          <a:solidFill>
+            <a:srgbClr val="FFC000">
+              <a:lumMod val="20000"/>
+              <a:lumOff val="80000"/>
+            </a:srgbClr>
+          </a:solidFill>
+          <a:ln w="25400" cap="flat" cmpd="sng" algn="ctr">
+            <a:solidFill>
+              <a:srgbClr val="FFC000">
+                <a:lumMod val="20000"/>
+                <a:lumOff val="80000"/>
+              </a:srgbClr>
+            </a:solidFill>
+            <a:prstDash val="solid"/>
+          </a:ln>
+          <a:effectLst/>
+        </p:spPr>
+        <p:txBody>
+          <a:bodyPr rot="0" spcFirstLastPara="1" vertOverflow="overflow" horzOverflow="overflow" vert="horz" wrap="square" lIns="91440" tIns="91440" rIns="91440" bIns="91440" numCol="1" spcCol="38100" rtlCol="0" anchor="ctr">
+            <a:spAutoFit/>
+          </a:bodyPr>
+          <a:lstStyle/>
+          <a:p>
+            <a:pPr defTabSz="914400">
+              <a:defRPr/>
+            </a:pPr>
+            <a:r>
+              <a:rPr lang="ru-RU" sz="2800" b="1">
+                <a:solidFill>
+                  <a:srgbClr val="404040"/>
+                </a:solidFill>
+                <a:latin typeface="Open Sans"/>
+                <a:cs typeface="Calibri"/>
+              </a:rPr>
+              <a:t>По учебному пособию Минздрава (2025) система оказания первой помощи в РФ состоит из пяти основных компонентов:</a:t>
+            </a:r>
+            <a:endParaRPr/>
+          </a:p>
+          <a:p>
+            <a:pPr defTabSz="914400">
+              <a:defRPr/>
+            </a:pPr>
+            <a:r>
+              <a:rPr lang="ru-RU" sz="2800" b="1">
+                <a:solidFill>
+                  <a:srgbClr val="404040"/>
+                </a:solidFill>
+                <a:latin typeface="Open Sans"/>
+                <a:cs typeface="Calibri"/>
+              </a:rPr>
+              <a:t> </a:t>
+            </a:r>
+            <a:endParaRPr/>
+          </a:p>
+          <a:p>
+            <a:pPr defTabSz="914400">
+              <a:defRPr/>
+            </a:pPr>
+            <a:r>
+              <a:rPr lang="ru-RU" sz="2800" b="1">
+                <a:solidFill>
+                  <a:srgbClr val="404040"/>
+                </a:solidFill>
+                <a:latin typeface="Open Sans"/>
+                <a:cs typeface="Calibri"/>
+              </a:rPr>
+              <a:t>1. Организация и нормативно-правовое обеспечение.</a:t>
+            </a:r>
+            <a:endParaRPr/>
+          </a:p>
+          <a:p>
+            <a:pPr defTabSz="914400">
+              <a:defRPr/>
+            </a:pPr>
+            <a:r>
+              <a:rPr lang="ru-RU" sz="2800" b="1">
+                <a:solidFill>
+                  <a:srgbClr val="404040"/>
+                </a:solidFill>
+                <a:latin typeface="Open Sans"/>
+                <a:cs typeface="Calibri"/>
+              </a:rPr>
+              <a:t>2. Обучение участников оказания первой помощи правилам и навыкам ее оказания.</a:t>
+            </a:r>
+            <a:endParaRPr/>
+          </a:p>
+          <a:p>
+            <a:pPr defTabSz="914400">
+              <a:defRPr/>
+            </a:pPr>
+            <a:r>
+              <a:rPr lang="ru-RU" sz="2800" b="1">
+                <a:solidFill>
+                  <a:srgbClr val="404040"/>
+                </a:solidFill>
+                <a:latin typeface="Open Sans"/>
+                <a:cs typeface="Calibri"/>
+              </a:rPr>
+              <a:t>3. Оснащение участников средствами для ее оказания (аптечками, укладками, наборами, комплектами).</a:t>
+            </a:r>
+            <a:endParaRPr/>
+          </a:p>
+          <a:p>
+            <a:pPr defTabSz="914400">
+              <a:defRPr/>
+            </a:pPr>
+            <a:r>
+              <a:rPr lang="ru-RU" sz="2800" b="1">
+                <a:solidFill>
+                  <a:srgbClr val="404040"/>
+                </a:solidFill>
+                <a:latin typeface="Open Sans"/>
+                <a:cs typeface="Calibri"/>
+              </a:rPr>
+              <a:t>4. Мотивирование на обучение и оказание первой помощи.</a:t>
+            </a:r>
+            <a:endParaRPr/>
+          </a:p>
+          <a:p>
+            <a:pPr defTabSz="914400">
+              <a:defRPr/>
+            </a:pPr>
+            <a:r>
+              <a:rPr lang="ru-RU" sz="2800" b="1">
+                <a:solidFill>
+                  <a:srgbClr val="404040"/>
+                </a:solidFill>
+                <a:latin typeface="Open Sans"/>
+                <a:cs typeface="Calibri"/>
+              </a:rPr>
+              <a:t>5. Учет и анализ эффективности оказания первой помощи.</a:t>
+            </a:r>
+            <a:endParaRPr/>
+          </a:p>
+        </p:txBody>
+      </p:sp>
+    </p:spTree>
+  </p:cSld>
+  <p:clrMapOvr>
+    <a:masterClrMapping/>
+  </p:clrMapOvr>
+</p:sld>
+</file>
+
+<file path=ppt/slides/slide3.xml><?xml version="1.0" encoding="utf-8"?>
+<p:sld xmlns:a="http://schemas.openxmlformats.org/drawingml/2006/main" xmlns:r="http://schemas.openxmlformats.org/officeDocument/2006/relationships" xmlns:p="http://schemas.openxmlformats.org/presentationml/2006/main" showMasterPhAnim="0">
+  <p:cSld>
+    <p:spTree>
+      <p:nvGrpSpPr>
+        <p:cNvPr id="1" name=""/>
+        <p:cNvGrpSpPr/>
+        <p:nvPr/>
+      </p:nvGrpSpPr>
+      <p:grpSpPr bwMode="auto">
+        <a:xfrm>
+          <a:off x="0" y="0"/>
+          <a:ext cx="0" cy="0"/>
+          <a:chOff x="0" y="0"/>
+          <a:chExt cx="0" cy="0"/>
+        </a:xfrm>
+      </p:grpSpPr>
+      <p:sp>
+        <p:nvSpPr>
+          <p:cNvPr id="866" name="Номер слайда"/>
+          <p:cNvSpPr txBox="1">
+            <a:spLocks noGrp="1"/>
+          </p:cNvSpPr>
+          <p:nvPr>
+            <p:ph type="sldNum" sz="quarter" idx="4294967295"/>
+          </p:nvPr>
+        </p:nvSpPr>
+        <p:spPr bwMode="auto">
+          <a:xfrm>
+            <a:off x="6350" y="6538852"/>
+            <a:ext cx="684000" cy="638316"/>
+          </a:xfrm>
+          <a:prstGeom prst="rect">
+            <a:avLst/>
+          </a:prstGeom>
+          <a:gradFill>
+            <a:gsLst>
+              <a:gs pos="0">
+                <a:srgbClr val="656565"/>
+              </a:gs>
+              <a:gs pos="50000">
+                <a:schemeClr val="accent6"/>
+              </a:gs>
+              <a:gs pos="100000">
+                <a:srgbClr val="444444"/>
+              </a:gs>
+            </a:gsLst>
+            <a:lin ang="5400000" scaled="1"/>
+          </a:gradFill>
+          <a:ln w="6350">
+            <a:solidFill>
+              <a:srgbClr val="DDDDDD"/>
+            </a:solidFill>
+            <a:miter lim="800000"/>
+          </a:ln>
+          <a:effectLst>
+            <a:outerShdw blurRad="63500" dist="19050" dir="5400000" rotWithShape="0">
+              <a:srgbClr val="000000">
+                <a:alpha val="63000"/>
+              </a:srgbClr>
+            </a:outerShdw>
+          </a:effectLst>
+        </p:spPr>
+        <p:txBody>
+          <a:bodyPr wrap="square"/>
+          <a:lstStyle>
+            <a:lvl1pPr>
+              <a:defRPr sz="3500">
+                <a:solidFill>
+                  <a:srgbClr val="FFFFFF"/>
+                </a:solidFill>
+              </a:defRPr>
+            </a:lvl1pPr>
+          </a:lstStyle>
+          <a:p>
+            <a:pPr algn="ctr" defTabSz="1828434">
+              <a:defRPr/>
+            </a:pPr>
+            <a:fld id="{86CB4B4D-7CA3-9044-876B-883B54F8677D}" type="slidenum">
+              <a:rPr kern="0">
+                <a:latin typeface="Open Sans Light"/>
+                <a:ea typeface="Open Sans"/>
+                <a:cs typeface="Calibri"/>
+                <a:sym typeface="Open Sans"/>
+              </a:rPr>
+              <a:pPr algn="ctr" defTabSz="1828434">
+                <a:defRPr/>
+              </a:pPr>
+              <a:t/>
+            </a:fld>
+            <a:r>
+              <a:rPr>
+                <a:solidFill/>
+              </a:rPr>
+              <a:t>3</a:t>
+            </a:r>
+            <a:endParaRPr kern="0">
+              <a:latin typeface="Open Sans Light"/>
+              <a:ea typeface="Open Sans"/>
+              <a:cs typeface="Calibri"/>
+              <a:sym typeface="Open Sans"/>
+            </a:endParaRPr>
+          </a:p>
+        </p:txBody>
+      </p:sp>
+      <p:sp>
+        <p:nvSpPr>
+          <p:cNvPr id="29" name="TextBox 6"/>
+          <p:cNvSpPr txBox="1"/>
+          <p:nvPr/>
+        </p:nvSpPr>
+        <p:spPr bwMode="auto">
+          <a:xfrm>
+            <a:off x="2061252" y="1845677"/>
+            <a:ext cx="24280504" cy="832087"/>
+          </a:xfrm>
+          <a:prstGeom prst="rect">
+            <a:avLst/>
+          </a:prstGeom>
+          <a:ln w="12700">
+            <a:miter lim="400000"/>
+          </a:ln>
+        </p:spPr>
+        <p:txBody>
+          <a:bodyPr wrap="square" lIns="45720" rIns="45720">
+            <a:spAutoFit/>
+          </a:bodyPr>
+          <a:lstStyle>
+            <a:lvl1pPr>
+              <a:defRPr sz="6600">
+                <a:solidFill>
+                  <a:srgbClr val="010101"/>
+                </a:solidFill>
+                <a:latin typeface="Montserrat Semi Bold"/>
+                <a:ea typeface="Montserrat Semi Bold"/>
+                <a:cs typeface="Montserrat Semi Bold"/>
+              </a:defRPr>
+            </a:lvl1pPr>
+          </a:lstStyle>
+          <a:p>
+            <a:pPr defTabSz="914400">
+              <a:defRPr/>
+            </a:pPr>
+            <a:r>
+              <a:rPr lang="ru-RU" sz="4600" dirty="0">
+                <a:solidFill>
+                  <a:srgbClr val="404040"/>
+                </a:solidFill>
+                <a:latin typeface="PFDinDisplayPro-Regular"/>
+                <a:ea typeface="PFDinDisplayPro-Regular"/>
+                <a:cs typeface="PFDinDisplayPro-Regular"/>
+                <a:sym typeface="Stem"/>
+              </a:rPr>
+              <a:t>ПОНЯТИЕ ПЕРВОЙ ПОМОЩИ</a:t>
+            </a:r>
+          </a:p>
+        </p:txBody>
+      </p:sp>
+      <p:sp>
+        <p:nvSpPr>
+          <p:cNvPr id="22" name="Rectangle 29"/>
+          <p:cNvSpPr/>
+          <p:nvPr/>
+        </p:nvSpPr>
+        <p:spPr bwMode="auto">
+          <a:xfrm>
+            <a:off x="2061258" y="2604670"/>
+            <a:ext cx="8596884" cy="72000"/>
+          </a:xfrm>
+          <a:prstGeom prst="rect">
+            <a:avLst/>
+          </a:prstGeom>
+          <a:gradFill>
+            <a:gsLst>
+              <a:gs pos="0">
+                <a:srgbClr val="656565"/>
+              </a:gs>
+              <a:gs pos="50000">
+                <a:schemeClr val="accent6"/>
+              </a:gs>
+              <a:gs pos="100000">
+                <a:srgbClr val="444444"/>
+              </a:gs>
+            </a:gsLst>
+            <a:lin ang="5400000" scaled="1"/>
+          </a:gradFill>
+          <a:ln w="6350">
+            <a:solidFill>
+              <a:srgbClr val="DDDDDD"/>
+            </a:solidFill>
+            <a:miter/>
+          </a:ln>
+          <a:effectLst>
+            <a:outerShdw blurRad="63500" dist="19050" dir="5400000" rotWithShape="0">
+              <a:srgbClr val="000000">
+                <a:alpha val="63000"/>
+              </a:srgbClr>
+            </a:outerShdw>
+          </a:effectLst>
+        </p:spPr>
+        <p:txBody>
+          <a:bodyPr lIns="45720" rIns="45720" anchor="ctr"/>
+          <a:lstStyle/>
+          <a:p>
+            <a:pPr defTabSz="1828434">
+              <a:defRPr>
+                <a:solidFill>
+                  <a:srgbClr val="FFFFFF"/>
+                </a:solidFill>
+              </a:defRPr>
+            </a:pPr>
+            <a:endParaRPr sz="3500">
+              <a:solidFill>
+                <a:srgbClr val="FFFFFF"/>
+              </a:solidFill>
+              <a:latin typeface="Open Sans Light"/>
+              <a:cs typeface="Calibri"/>
+              <a:sym typeface="Open Sans"/>
+            </a:endParaRPr>
+          </a:p>
+        </p:txBody>
+      </p:sp>
+      <p:sp>
+        <p:nvSpPr>
+          <p:cNvPr id="5" name="Подзаголовок 2"/>
+          <p:cNvSpPr txBox="1">
+            <a:spLocks/>
+          </p:cNvSpPr>
+          <p:nvPr/>
+        </p:nvSpPr>
+        <p:spPr bwMode="auto">
+          <a:xfrm>
+            <a:off x="2055994" y="2753858"/>
+            <a:ext cx="6408712" cy="681808"/>
+          </a:xfrm>
+          <a:prstGeom prst="rect">
+            <a:avLst/>
+          </a:prstGeom>
+          <a:ln w="25400">
+            <a:miter lim="400000"/>
+          </a:ln>
+        </p:spPr>
+        <p:txBody>
+          <a:bodyPr tIns="91440" bIns="91440" anchor="ctr">
+            <a:normAutofit/>
+          </a:bodyPr>
+          <a:lstStyle>
+            <a:lvl1pPr marL="0" marR="0" indent="0" algn="r" defTabSz="1828800">
+              <a:lnSpc>
+                <a:spcPct val="110000"/>
+              </a:lnSpc>
+              <a:spcBef>
+                <a:spcPts val="0"/>
+              </a:spcBef>
+              <a:spcAft>
+                <a:spcPts val="0"/>
+              </a:spcAft>
+              <a:buClrTx/>
+              <a:buSzTx/>
+              <a:buFontTx/>
+              <a:buNone/>
+              <a:defRPr sz="2800" b="0" i="0" u="none" strike="noStrike" cap="none" spc="0">
+                <a:solidFill>
+                  <a:srgbClr val="535353"/>
+                </a:solidFill>
+                <a:latin typeface="Open Sans"/>
+                <a:ea typeface="Open Sans"/>
+                <a:cs typeface="Open Sans"/>
+              </a:defRPr>
+            </a:lvl1pPr>
+            <a:lvl2pPr marL="0" marR="0" indent="457200" algn="l" defTabSz="1828800">
+              <a:lnSpc>
+                <a:spcPct val="110000"/>
+              </a:lnSpc>
+              <a:spcBef>
+                <a:spcPts val="0"/>
+              </a:spcBef>
+              <a:spcAft>
+                <a:spcPts val="0"/>
+              </a:spcAft>
+              <a:buClrTx/>
+              <a:buSzTx/>
+              <a:buFontTx/>
+              <a:buNone/>
+              <a:defRPr sz="2400" b="0" i="0" u="none" strike="noStrike" cap="none" spc="0">
+                <a:solidFill>
+                  <a:srgbClr val="535353"/>
+                </a:solidFill>
+                <a:latin typeface="Open Sans"/>
+                <a:ea typeface="Open Sans"/>
+                <a:cs typeface="Open Sans"/>
+              </a:defRPr>
+            </a:lvl2pPr>
+            <a:lvl3pPr marL="0" marR="0" indent="914400" algn="l" defTabSz="1828800">
+              <a:lnSpc>
+                <a:spcPct val="110000"/>
+              </a:lnSpc>
+              <a:spcBef>
+                <a:spcPts val="0"/>
+              </a:spcBef>
+              <a:spcAft>
+                <a:spcPts val="0"/>
+              </a:spcAft>
+              <a:buClrTx/>
+              <a:buSzTx/>
+              <a:buFontTx/>
+              <a:buNone/>
+              <a:defRPr sz="2400" b="0" i="0" u="none" strike="noStrike" cap="none" spc="0">
+                <a:solidFill>
+                  <a:srgbClr val="535353"/>
+                </a:solidFill>
+                <a:latin typeface="Open Sans"/>
+                <a:ea typeface="Open Sans"/>
+                <a:cs typeface="Open Sans"/>
+              </a:defRPr>
+            </a:lvl3pPr>
+            <a:lvl4pPr marL="0" marR="0" indent="1371600" algn="l" defTabSz="1828800">
+              <a:lnSpc>
+                <a:spcPct val="110000"/>
+              </a:lnSpc>
+              <a:spcBef>
+                <a:spcPts val="0"/>
+              </a:spcBef>
+              <a:spcAft>
+                <a:spcPts val="0"/>
+              </a:spcAft>
+              <a:buClrTx/>
+              <a:buSzTx/>
+              <a:buFontTx/>
+              <a:buNone/>
+              <a:defRPr sz="2400" b="0" i="0" u="none" strike="noStrike" cap="none" spc="0">
+                <a:solidFill>
+                  <a:srgbClr val="535353"/>
+                </a:solidFill>
+                <a:latin typeface="Open Sans"/>
+                <a:ea typeface="Open Sans"/>
+                <a:cs typeface="Open Sans"/>
+              </a:defRPr>
+            </a:lvl4pPr>
+            <a:lvl5pPr marL="0" marR="0" indent="1828800" algn="l" defTabSz="1828800">
+              <a:lnSpc>
+                <a:spcPct val="110000"/>
+              </a:lnSpc>
+              <a:spcBef>
+                <a:spcPts val="0"/>
+              </a:spcBef>
+              <a:spcAft>
+                <a:spcPts val="0"/>
+              </a:spcAft>
+              <a:buClrTx/>
+              <a:buSzTx/>
+              <a:buFontTx/>
+              <a:buNone/>
+              <a:defRPr sz="2400" b="0" i="0" u="none" strike="noStrike" cap="none" spc="0">
+                <a:solidFill>
+                  <a:srgbClr val="535353"/>
+                </a:solidFill>
+                <a:latin typeface="Open Sans"/>
+                <a:ea typeface="Open Sans"/>
+                <a:cs typeface="Open Sans"/>
+              </a:defRPr>
+            </a:lvl5pPr>
+            <a:lvl6pPr marL="0" marR="0" indent="2286000" algn="l" defTabSz="1828800">
+              <a:lnSpc>
+                <a:spcPct val="110000"/>
+              </a:lnSpc>
+              <a:spcBef>
+                <a:spcPts val="0"/>
+              </a:spcBef>
+              <a:spcAft>
+                <a:spcPts val="0"/>
+              </a:spcAft>
+              <a:buClrTx/>
+              <a:buSzTx/>
+              <a:buFontTx/>
+              <a:buNone/>
+              <a:defRPr sz="2400" b="0" i="0" u="none" strike="noStrike" cap="none" spc="0">
+                <a:solidFill>
+                  <a:srgbClr val="0082B9"/>
+                </a:solidFill>
+                <a:latin typeface="Open Sans"/>
+                <a:ea typeface="Open Sans"/>
+                <a:cs typeface="Open Sans"/>
+              </a:defRPr>
+            </a:lvl6pPr>
+            <a:lvl7pPr marL="0" marR="0" indent="2743200" algn="l" defTabSz="1828800">
+              <a:lnSpc>
+                <a:spcPct val="110000"/>
+              </a:lnSpc>
+              <a:spcBef>
+                <a:spcPts val="0"/>
+              </a:spcBef>
+              <a:spcAft>
+                <a:spcPts val="0"/>
+              </a:spcAft>
+              <a:buClrTx/>
+              <a:buSzTx/>
+              <a:buFontTx/>
+              <a:buNone/>
+              <a:defRPr sz="2400" b="0" i="0" u="none" strike="noStrike" cap="none" spc="0">
+                <a:solidFill>
+                  <a:srgbClr val="0082B9"/>
+                </a:solidFill>
+                <a:latin typeface="Open Sans"/>
+                <a:ea typeface="Open Sans"/>
+                <a:cs typeface="Open Sans"/>
+              </a:defRPr>
+            </a:lvl7pPr>
+            <a:lvl8pPr marL="0" marR="0" indent="3200400" algn="l" defTabSz="1828800">
+              <a:lnSpc>
+                <a:spcPct val="110000"/>
+              </a:lnSpc>
+              <a:spcBef>
+                <a:spcPts val="0"/>
+              </a:spcBef>
+              <a:spcAft>
+                <a:spcPts val="0"/>
+              </a:spcAft>
+              <a:buClrTx/>
+              <a:buSzTx/>
+              <a:buFontTx/>
+              <a:buNone/>
+              <a:defRPr sz="2400" b="0" i="0" u="none" strike="noStrike" cap="none" spc="0">
+                <a:solidFill>
+                  <a:srgbClr val="0082B9"/>
+                </a:solidFill>
+                <a:latin typeface="Open Sans"/>
+                <a:ea typeface="Open Sans"/>
+                <a:cs typeface="Open Sans"/>
+              </a:defRPr>
+            </a:lvl8pPr>
+            <a:lvl9pPr marL="0" marR="0" indent="3657600" algn="l" defTabSz="1828800">
+              <a:lnSpc>
+                <a:spcPct val="110000"/>
+              </a:lnSpc>
+              <a:spcBef>
+                <a:spcPts val="0"/>
+              </a:spcBef>
+              <a:spcAft>
+                <a:spcPts val="0"/>
+              </a:spcAft>
+              <a:buClrTx/>
+              <a:buSzTx/>
+              <a:buFontTx/>
+              <a:buNone/>
+              <a:defRPr sz="2400" b="0" i="0" u="none" strike="noStrike" cap="none" spc="0">
+                <a:solidFill>
+                  <a:srgbClr val="0082B9"/>
+                </a:solidFill>
+                <a:latin typeface="Open Sans"/>
+                <a:ea typeface="Open Sans"/>
+                <a:cs typeface="Open Sans"/>
+              </a:defRPr>
+            </a:lvl9pPr>
+          </a:lstStyle>
+          <a:p>
+            <a:pPr>
+              <a:defRPr/>
+            </a:pPr>
+            <a:r>
+              <a:rPr lang="ru-RU">
+                <a:solidFill/>
+              </a:rPr>
+              <a:t>Тема 1 · п. 1  Организация и нормативно-правовая база</a:t>
+            </a:r>
+            <a:endParaRPr lang="ru-RU" dirty="0"/>
+          </a:p>
+        </p:txBody>
+      </p:sp>
+      <p:pic>
+        <p:nvPicPr>
+          <p:cNvPr id="10" name="Picture 5"/>
+          <p:cNvPicPr>
+            <a:picLocks noChangeAspect="1" noChangeArrowheads="1"/>
+          </p:cNvPicPr>
+          <p:nvPr/>
+        </p:nvPicPr>
+        <p:blipFill>
+          <a:blip r:embed="rId2"/>
+          <a:srcRect t="11351"/>
+          <a:stretch/>
+        </p:blipFill>
+        <p:spPr bwMode="auto">
+          <a:xfrm>
+            <a:off x="1833400" y="7232303"/>
+            <a:ext cx="2727076" cy="5808806"/>
+          </a:xfrm>
+          <a:prstGeom prst="rect">
+            <a:avLst/>
+          </a:prstGeom>
+          <a:noFill/>
+          <a:ln>
+            <a:noFill/>
+          </a:ln>
+          <a:effectLst/>
+        </p:spPr>
+      </p:pic>
+      <p:sp>
+        <p:nvSpPr>
+          <p:cNvPr id="11" name="Овальная выноска 4"/>
+          <p:cNvSpPr/>
+          <p:nvPr/>
+        </p:nvSpPr>
+        <p:spPr bwMode="auto">
+          <a:xfrm>
+            <a:off x="3875079" y="3861098"/>
+            <a:ext cx="7589738" cy="4258675"/>
+          </a:xfrm>
+          <a:prstGeom prst="wedgeEllipseCallout">
+            <a:avLst>
+              <a:gd name="adj1" fmla="val -53192"/>
+              <a:gd name="adj2" fmla="val 46931"/>
+            </a:avLst>
+          </a:prstGeom>
+          <a:solidFill>
+            <a:srgbClr val="FFC000">
+              <a:lumMod val="20000"/>
+              <a:lumOff val="80000"/>
+            </a:srgbClr>
+          </a:solidFill>
+          <a:ln w="25400" cap="flat" cmpd="sng" algn="ctr">
+            <a:solidFill>
+              <a:srgbClr val="FFC000">
+                <a:lumMod val="20000"/>
+                <a:lumOff val="80000"/>
+              </a:srgbClr>
+            </a:solidFill>
+            <a:prstDash val="solid"/>
+          </a:ln>
+          <a:effectLst/>
+        </p:spPr>
+        <p:txBody>
+          <a:bodyPr rot="0" spcFirstLastPara="1" vertOverflow="overflow" horzOverflow="overflow" vert="horz" wrap="square" lIns="91440" tIns="91440" rIns="91440" bIns="91440" numCol="1" spcCol="38100" rtlCol="0" anchor="ctr">
+            <a:spAutoFit/>
+          </a:bodyPr>
+          <a:lstStyle/>
+          <a:p>
+            <a:pPr defTabSz="914400">
+              <a:defRPr/>
+            </a:pPr>
+            <a:r>
+              <a:rPr lang="ru-RU" sz="2800" b="1">
+                <a:solidFill/>
                 <a:cs typeface="Calibri"/>
               </a:rPr>
               <a:t>Первая помощь </a:t>
             </a:r>
             <a:r>
               <a:rPr lang="ru-RU" sz="2800">
+                <a:solidFill/>
                 <a:cs typeface="Calibri"/>
               </a:rPr>
               <a:t>- комплекс мероприятий, направленных на поддержание жизни и здоровья, оказываемых до оказания медицинской помощи пострадавшим</a:t>
@@ -45289,6 +45538,9 @@
               <a:t/>
             </a:fld>
             <a:r>
+              <a:rPr>
+                <a:solidFill/>
+              </a:rPr>
               <a:t>4</a:t>
             </a:r>
             <a:endParaRPr>
@@ -45732,7 +45984,9 @@
               <a:defRPr/>
             </a:pPr>
             <a:r>
-              <a:rPr lang="ru-RU" sz="2800" b="1"/>
+              <a:rPr lang="ru-RU" sz="2800" b="1">
+                <a:solidFill/>
+              </a:rPr>
               <a:t>На сегодняшний день система оказания первой помощи в Российской Федерации состоит из пяти основных компонентов:
 Нормативно-правовое обеспечение (федеральные законы и прочие нормативные акты и документы, определяющие обязанности и права участников оказания первой помощи, их оснащение, объем первой помощи и т.д.).
 Обучение участников оказания первой помощи правилам и навыкам ее оказания.
@@ -45752,7 +46006,9 @@
               <a:defRPr/>
             </a:pPr>
             <a:r>
-              <a:rPr lang="ru-RU" sz="2800"/>
+              <a:rPr lang="ru-RU" sz="2800">
+                <a:solidFill/>
+              </a:rPr>
               <a:t/>
             </a:r>
             <a:endParaRPr/>
@@ -45770,7 +46026,9 @@
               <a:defRPr/>
             </a:pPr>
             <a:r>
-              <a:rPr lang="ru-RU" sz="2800"/>
+              <a:rPr lang="ru-RU" sz="2800">
+                <a:solidFill/>
+              </a:rPr>
               <a:t/>
             </a:r>
             <a:endParaRPr/>
@@ -45788,7 +46046,9 @@
               <a:defRPr/>
             </a:pPr>
             <a:r>
-              <a:rPr lang="ru-RU" sz="2800"/>
+              <a:rPr lang="ru-RU" sz="2800">
+                <a:solidFill/>
+              </a:rPr>
               <a:t/>
             </a:r>
             <a:endParaRPr/>
@@ -45970,6 +46230,9 @@
               <a:t/>
             </a:fld>
             <a:r>
+              <a:rPr>
+                <a:solidFill/>
+              </a:rPr>
               <a:t>5</a:t>
             </a:r>
             <a:endParaRPr kumimoji="0" sz="3500" b="0" i="0" u="none" strike="noStrike" kern="0" cap="none" spc="0" normalizeH="0" baseline="0" noProof="0">
@@ -46458,27 +46721,39 @@
               <a:defRPr/>
             </a:pPr>
             <a:r>
-              <a:rPr lang="ru-RU" sz="2800" b="1"/>
+              <a:rPr lang="ru-RU" sz="2800" b="1">
+                <a:solidFill/>
+              </a:rPr>
               <a:t>Участники оказания первой помощи </a:t>
             </a:r>
             <a:r>
-              <a:rPr lang="ru-RU" sz="2800"/>
+              <a:rPr lang="ru-RU" sz="2800">
+                <a:solidFill/>
+              </a:rPr>
               <a:t>могут иметь различную подготовку к ее оказанию и оснащение. Также они могут быть </a:t>
             </a:r>
             <a:r>
-              <a:rPr lang="ru-RU" sz="2800" b="1"/>
+              <a:rPr lang="ru-RU" sz="2800" b="1">
+                <a:solidFill/>
+              </a:rPr>
               <a:t>обязанными оказывать первую помощь</a:t>
             </a:r>
             <a:r>
-              <a:rPr lang="ru-RU" sz="2800"/>
+              <a:rPr lang="ru-RU" sz="2800">
+                <a:solidFill/>
+              </a:rPr>
               <a:t>, либо </a:t>
             </a:r>
             <a:r>
-              <a:rPr lang="ru-RU" sz="2800" b="1"/>
+              <a:rPr lang="ru-RU" sz="2800" b="1">
+                <a:solidFill/>
+              </a:rPr>
               <a:t>иметь право ее оказывать</a:t>
             </a:r>
             <a:r>
-              <a:rPr lang="ru-RU" sz="2800"/>
+              <a:rPr lang="ru-RU" sz="2800">
+                <a:solidFill/>
+              </a:rPr>
               <a:t>. </a:t>
             </a:r>
           </a:p>
@@ -46493,15 +46768,21 @@
               <a:defRPr/>
             </a:pPr>
             <a:r>
-              <a:rPr lang="ru-RU" sz="2800"/>
+              <a:rPr lang="ru-RU" sz="2800">
+                <a:solidFill/>
+              </a:rPr>
               <a:t>В большинстве случаев первая помощь должна заканчиваться передачей пострадавших прибывшей </a:t>
             </a:r>
             <a:r>
-              <a:rPr lang="ru-RU" sz="2800" b="1"/>
+              <a:rPr lang="ru-RU" sz="2800" b="1">
+                <a:solidFill/>
+              </a:rPr>
               <a:t>бригаде скорой медицинской помощи</a:t>
             </a:r>
             <a:r>
-              <a:rPr lang="ru-RU" sz="2800"/>
+              <a:rPr lang="ru-RU" sz="2800">
+                <a:solidFill/>
+              </a:rPr>
               <a:t>, которая, продолжая оказание помощи в пути, доставляет пострадавшего в лечебное учреждение.</a:t>
             </a:r>
             <a:endParaRPr/>
@@ -46675,6 +46956,9 @@
               <a:t/>
             </a:fld>
             <a:r>
+              <a:rPr>
+                <a:solidFill/>
+              </a:rPr>
               <a:t>6</a:t>
             </a:r>
             <a:endParaRPr kumimoji="0" sz="3500" b="0" i="0" u="none" strike="noStrike" kern="0" cap="none" spc="0" normalizeH="0" baseline="0" noProof="0">
@@ -47161,15 +47445,21 @@
               <a:defRPr/>
             </a:pPr>
             <a:r>
-              <a:rPr lang="ru-RU" sz="2800"/>
+              <a:rPr lang="ru-RU" sz="2800">
+                <a:solidFill/>
+              </a:rPr>
               <a:t>Федеральный закон от 21.11.2011 №323-ФЗ </a:t>
             </a:r>
             <a:r>
-              <a:rPr lang="ru-RU" sz="2800" b="1"/>
+              <a:rPr lang="ru-RU" sz="2800" b="1">
+                <a:solidFill/>
+              </a:rPr>
               <a:t>«Об основах охраны здоровья граждан Российской Федерации»</a:t>
             </a:r>
             <a:r>
-              <a:rPr lang="ru-RU" sz="2800"/>
+              <a:rPr lang="ru-RU" sz="2800">
+                <a:solidFill/>
+              </a:rPr>
               <a:t>:</a:t>
             </a:r>
             <a:endParaRPr/>
@@ -47185,7 +47475,9 @@
               <a:defRPr/>
             </a:pPr>
             <a:r>
-              <a:rPr lang="ru-RU" sz="2800" b="1"/>
+              <a:rPr lang="ru-RU" sz="2800" b="1">
+                <a:solidFill/>
+              </a:rPr>
               <a:t>Статья 31. Первая помощь:</a:t>
             </a:r>
             <a:endParaRPr/>
@@ -47201,7 +47493,9 @@
               <a:defRPr/>
             </a:pPr>
             <a:r>
-              <a:rPr lang="ru-RU" sz="2800"/>
+              <a:rPr lang="ru-RU" sz="2800">
+                <a:solidFill/>
+              </a:rPr>
               <a:t>«1. Первая помощь до оказания медицинской помощи оказывается гражданам при несчастных случаях, травмах, отравлениях и других состояниях и заболеваниях, угрожающих их жизни и здоровью…»</a:t>
             </a:r>
             <a:endParaRPr/>
@@ -47217,7 +47511,9 @@
               <a:defRPr/>
             </a:pPr>
             <a:r>
-              <a:rPr lang="ru-RU" sz="2800"/>
+              <a:rPr lang="ru-RU" sz="2800">
+                <a:solidFill/>
+              </a:rPr>
               <a:t>« 4. Водители транспортных средств и другие лица вправе оказывать первую помощь при наличии соответствующей подготовки и (или) навыков.»</a:t>
             </a:r>
           </a:p>
@@ -47393,6 +47689,9 @@
               <a:t/>
             </a:fld>
             <a:r>
+              <a:rPr>
+                <a:solidFill/>
+              </a:rPr>
               <a:t>7</a:t>
             </a:r>
             <a:endParaRPr kumimoji="0" sz="3500" b="0" i="0" u="none" strike="noStrike" kern="0" cap="none" spc="0" normalizeH="0" baseline="0" noProof="0">
@@ -47897,15 +48196,21 @@
               <a:defRPr/>
             </a:pPr>
             <a:r>
-              <a:rPr lang="ru-RU"/>
+              <a:rPr lang="ru-RU">
+                <a:solidFill/>
+              </a:rPr>
               <a:t>Законодательство разного уровня устанавливает обязанность по оказанию первой помощи для лиц, которые </a:t>
             </a:r>
             <a:r>
-              <a:rPr lang="ru-RU" b="1"/>
+              <a:rPr lang="ru-RU" b="1">
+                <a:solidFill/>
+              </a:rPr>
               <a:t>в силу профессиональных обязанностей первыми оказываются на месте происшествия </a:t>
             </a:r>
             <a:r>
-              <a:rPr lang="ru-RU"/>
+              <a:rPr lang="ru-RU">
+                <a:solidFill/>
+              </a:rPr>
               <a:t>с пострадавшими.</a:t>
             </a:r>
             <a:endParaRPr/>
@@ -47921,39 +48226,57 @@
               <a:defRPr/>
             </a:pPr>
             <a:r>
-              <a:rPr lang="ru-RU"/>
+              <a:rPr lang="ru-RU">
+                <a:solidFill/>
+              </a:rPr>
               <a:t>Обязанность </a:t>
             </a:r>
             <a:r>
-              <a:rPr lang="ru-RU" b="1"/>
+              <a:rPr lang="ru-RU" b="1">
+                <a:solidFill/>
+              </a:rPr>
               <a:t>«…принять меры для оказания первой помощи…» </a:t>
             </a:r>
             <a:r>
-              <a:rPr lang="ru-RU"/>
+              <a:rPr lang="ru-RU">
+                <a:solidFill/>
+              </a:rPr>
               <a:t>возникает у водителей, причастных к ДТП (п. 2.6 ПДД РФ). Принятие мер к оказанию первой помощи относится к обязанностям водителя в связи с ДТП, за невыполнение которых водителю грозит </a:t>
             </a:r>
             <a:r>
-              <a:rPr lang="ru-RU" b="1"/>
+              <a:rPr lang="ru-RU" b="1">
+                <a:solidFill/>
+              </a:rPr>
               <a:t>привлечение к административной ответственности и наказание в виде административного штрафа </a:t>
             </a:r>
             <a:r>
-              <a:rPr lang="ru-RU"/>
+              <a:rPr lang="ru-RU">
+                <a:solidFill/>
+              </a:rPr>
               <a:t>(ч. 1 ст. 12.27 КоАП). В том случае, если гражданин </a:t>
             </a:r>
             <a:r>
-              <a:rPr lang="ru-RU" b="1"/>
+              <a:rPr lang="ru-RU" b="1">
+                <a:solidFill/>
+              </a:rPr>
               <a:t>заведомо оставил пострадавшего</a:t>
             </a:r>
             <a:r>
-              <a:rPr lang="ru-RU"/>
+              <a:rPr lang="ru-RU">
+                <a:solidFill/>
+              </a:rPr>
               <a:t>, находящегося в беспомощном состоянии без возможности получения помощи, </a:t>
             </a:r>
             <a:r>
-              <a:rPr lang="ru-RU" b="1"/>
+              <a:rPr lang="ru-RU" b="1">
+                <a:solidFill/>
+              </a:rPr>
               <a:t>он может быть привлечен к уголовной ответственности </a:t>
             </a:r>
             <a:r>
-              <a:rPr lang="ru-RU"/>
+              <a:rPr lang="ru-RU">
+                <a:solidFill/>
+              </a:rPr>
               <a:t>(ст. 125 «Оставление в опасности» УК РФ). </a:t>
             </a:r>
           </a:p>
@@ -47968,15 +48291,21 @@
               <a:defRPr/>
             </a:pPr>
             <a:r>
-              <a:rPr lang="ru-RU"/>
+              <a:rPr lang="ru-RU">
+                <a:solidFill/>
+              </a:rPr>
               <a:t>В том случае, если водитель не причастен к ДТП, но стал его свидетелем, согласно ч. 4 ст. 31 Федерального закона № 323-ФЗ «Об основах охраны здоровья граждан в Российской Федерации», </a:t>
             </a:r>
             <a:r>
-              <a:rPr lang="ru-RU" b="1"/>
+              <a:rPr lang="ru-RU" b="1">
+                <a:solidFill/>
+              </a:rPr>
               <a:t>водитель вправе добровольно оказать первую помощь</a:t>
             </a:r>
             <a:r>
-              <a:rPr lang="ru-RU"/>
+              <a:rPr lang="ru-RU">
+                <a:solidFill/>
+              </a:rPr>
               <a:t>.</a:t>
             </a:r>
           </a:p>
@@ -48156,6 +48485,9 @@
               <a:t/>
             </a:fld>
             <a:r>
+              <a:rPr>
+                <a:solidFill/>
+              </a:rPr>
               <a:t>8</a:t>
             </a:r>
             <a:endParaRPr kumimoji="0" sz="3500" b="0" i="0" u="none" strike="noStrike" kern="0" cap="none" spc="0" normalizeH="0" baseline="0" noProof="0">
@@ -48660,15 +48992,21 @@
               <a:defRPr/>
             </a:pPr>
             <a:r>
-              <a:rPr lang="ru-RU" sz="2800" dirty="0"/>
+              <a:rPr lang="ru-RU" sz="2800" dirty="0">
+                <a:solidFill/>
+              </a:rPr>
               <a:t>Статья 228 Трудового кодекса Российской Федерации предусматривает обязанность работодателя при несчастном случае на производстве </a:t>
             </a:r>
             <a:r>
-              <a:rPr lang="ru-RU" sz="2800" b="1" dirty="0"/>
+              <a:rPr lang="ru-RU" sz="2800" b="1" dirty="0">
+                <a:solidFill/>
+              </a:rPr>
               <a:t>«немедленно организовать первую помощь пострадавшему и при необходимости доставку его в медицинскую организацию»</a:t>
             </a:r>
             <a:r>
-              <a:rPr lang="ru-RU" sz="2800" dirty="0"/>
+              <a:rPr lang="ru-RU" sz="2800" dirty="0">
+                <a:solidFill/>
+              </a:rPr>
               <a:t>. </a:t>
             </a:r>
           </a:p>
@@ -48683,15 +49021,21 @@
               <a:defRPr/>
             </a:pPr>
             <a:r>
-              <a:rPr lang="ru-RU" sz="2800" dirty="0"/>
+              <a:rPr lang="ru-RU" sz="2800" dirty="0">
+                <a:solidFill/>
+              </a:rPr>
               <a:t>Для организации оказания первой помощи при несчастном случае на производстве силами работников на работодателя возложена обязанность </a:t>
             </a:r>
             <a:r>
-              <a:rPr lang="ru-RU" sz="2800" b="1" dirty="0"/>
+              <a:rPr lang="ru-RU" sz="2800" b="1" dirty="0">
+                <a:solidFill/>
+              </a:rPr>
               <a:t>организовывать обучение первой помощи </a:t>
             </a:r>
             <a:r>
-              <a:rPr lang="ru-RU" sz="2800" dirty="0"/>
+              <a:rPr lang="ru-RU" sz="2800" dirty="0">
+                <a:solidFill/>
+              </a:rPr>
               <a:t>для всех поступающих на работу лиц, а также для работников, переводимых на другую работу (ст. 214, 219 ТК РФ). </a:t>
             </a:r>
             <a:endParaRPr dirty="0"/>
@@ -48707,15 +49051,21 @@
               <a:defRPr/>
             </a:pPr>
             <a:r>
-              <a:rPr lang="ru-RU" sz="2800" dirty="0"/>
+              <a:rPr lang="ru-RU" sz="2800" dirty="0">
+                <a:solidFill/>
+              </a:rPr>
               <a:t>Для работника ТК РФ предусматривает обязанность </a:t>
             </a:r>
             <a:r>
-              <a:rPr lang="ru-RU" sz="2800" b="1" dirty="0"/>
+              <a:rPr lang="ru-RU" sz="2800" b="1" dirty="0">
+                <a:solidFill/>
+              </a:rPr>
               <a:t>«проходить обучение по оказанию первой помощи пострадавшим на производстве» </a:t>
             </a:r>
             <a:r>
-              <a:rPr lang="ru-RU" sz="2800" dirty="0"/>
+              <a:rPr lang="ru-RU" sz="2800" dirty="0">
+                <a:solidFill/>
+              </a:rPr>
               <a:t>(ст. 215 ТК РФ). </a:t>
             </a:r>
           </a:p>
@@ -48884,6 +49234,9 @@
               <a:t/>
             </a:fld>
             <a:r>
+              <a:rPr>
+                <a:solidFill/>
+              </a:rPr>
               <a:t>9</a:t>
             </a:r>
             <a:endParaRPr kumimoji="0" sz="3500" b="0" i="0" u="none" strike="noStrike" kern="0" cap="none" spc="0" normalizeH="0" baseline="0" noProof="0">
@@ -49388,7 +49741,9 @@
               <a:defRPr/>
             </a:pPr>
             <a:r>
-              <a:rPr lang="ru-RU" sz="2800" b="1"/>
+              <a:rPr lang="ru-RU" sz="2800" b="1">
+                <a:solidFill/>
+              </a:rPr>
               <a:t>Освобождение от ответственности:</a:t>
             </a:r>
             <a:endParaRPr/>
@@ -49404,7 +49759,9 @@
               <a:defRPr/>
             </a:pPr>
             <a:r>
-              <a:rPr lang="ru-RU" sz="2800" b="1"/>
+              <a:rPr lang="ru-RU" sz="2800" b="1">
+                <a:solidFill/>
+              </a:rPr>
               <a:t>УК РФ ст. 39. Крайняя необходимость:</a:t>
             </a:r>
             <a:endParaRPr/>
@@ -49420,7 +49777,9 @@
               <a:defRPr/>
             </a:pPr>
             <a:r>
-              <a:rPr lang="ru-RU" sz="2800"/>
+              <a:rPr lang="ru-RU" sz="2800">
+                <a:solidFill/>
+              </a:rPr>
               <a:t>«Не является преступлением причинение вреда … в состоянии крайней необходимости, то есть для устранения опасности, непосредственно угрожающей личности и правам данного лица …»</a:t>
             </a:r>
             <a:endParaRPr/>
@@ -49436,7 +49795,9 @@
               <a:defRPr/>
             </a:pPr>
             <a:r>
-              <a:rPr lang="ru-RU" sz="2800" b="1"/>
+              <a:rPr lang="ru-RU" sz="2800" b="1">
+                <a:solidFill/>
+              </a:rPr>
               <a:t>КоАП РФ ст. 2.7. Крайняя необходимость:</a:t>
             </a:r>
             <a:endParaRPr/>
@@ -49452,7 +49813,9 @@
               <a:defRPr/>
             </a:pPr>
             <a:r>
-              <a:rPr lang="ru-RU" sz="2800"/>
+              <a:rPr lang="ru-RU" sz="2800">
+                <a:solidFill/>
+              </a:rPr>
               <a:t>«Не является административным правонарушением причинение лицом вреда … в состоянии крайней необходимости, то есть для устранения опасности, непосредственно угрожающей личности и правам данного лица …»</a:t>
             </a:r>
             <a:endParaRPr/>
@@ -49468,15 +49831,21 @@
               <a:defRPr/>
             </a:pPr>
             <a:r>
-              <a:rPr lang="ru-RU" sz="2800"/>
+              <a:rPr lang="ru-RU" sz="2800">
+                <a:solidFill/>
+              </a:rPr>
               <a:t>В случае решения в суде вопроса о привлечении лица к ответственности за причинение вреда жизни или здоровью, оказание первой помощи пострадавшему учитывается как </a:t>
             </a:r>
             <a:r>
-              <a:rPr lang="ru-RU" sz="2800" b="1"/>
+              <a:rPr lang="ru-RU" sz="2800" b="1">
+                <a:solidFill/>
+              </a:rPr>
               <a:t>обстоятельство, смягчающее наказание </a:t>
             </a:r>
             <a:r>
-              <a:rPr lang="ru-RU" sz="2800"/>
+              <a:rPr lang="ru-RU" sz="2800">
+                <a:solidFill/>
+              </a:rPr>
               <a:t>(п. 2 ч. 1 ст. 4.2 Кодекса Российской Федерации об административных правонарушениях; п. «к» ч. 1 ст. 61 Уголовного Кодекса Российской Федерации).</a:t>
             </a:r>
             <a:endParaRPr/>

--- a/first_aid_tema1_numbered/1_Организация_оказания_первой_помощи_в_РФ_Нормативно-правовая_база.pptx
+++ b/first_aid_tema1_numbered/1_Организация_оказания_первой_помощи_в_РФ_Нормативно-правовая_база.pptx
@@ -43681,9 +43681,6 @@
               <a:t/>
             </a:fld>
             <a:r>
-              <a:rPr>
-                <a:solidFill/>
-              </a:rPr>
               <a:t>10</a:t>
             </a:r>
             <a:endParaRPr kern="0">
@@ -44062,6 +44059,34 @@
           </a:p>
         </p:txBody>
       </p:sp>
+      <p:pic>
+        <p:nvPicPr>
+          <p:cNvPr id="10" name="Picture 5"/>
+          <p:cNvPicPr>
+            <a:picLocks noChangeAspect="1" noChangeArrowheads="1"/>
+          </p:cNvPicPr>
+          <p:nvPr/>
+        </p:nvPicPr>
+        <p:blipFill>
+          <a:blip r:embed="rId2"/>
+          <a:srcRect t="11351"/>
+          <a:stretch/>
+        </p:blipFill>
+        <p:spPr bwMode="auto">
+          <a:xfrm>
+            <a:off x="1833400" y="7232303"/>
+            <a:ext cx="2727076" cy="5808806"/>
+          </a:xfrm>
+          <a:prstGeom prst="rect">
+            <a:avLst/>
+          </a:prstGeom>
+          <a:noFill/>
+          <a:ln>
+            <a:noFill/>
+          </a:ln>
+          <a:effectLst/>
+        </p:spPr>
+      </p:pic>
       <p:sp>
         <p:nvSpPr>
           <p:cNvPr id="11" name="Овальная выноска 4"/>
@@ -44070,8 +44095,8 @@
         </p:nvSpPr>
         <p:spPr bwMode="auto">
           <a:xfrm>
-            <a:off x="2061252" y="3600000"/>
-            <a:ext cx="20000000" cy="9000000"/>
+            <a:off x="3875079" y="3861098"/>
+            <a:ext cx="7589738" cy="4258675"/>
           </a:xfrm>
           <a:prstGeom prst="wedgeEllipseCallout">
             <a:avLst>
@@ -44106,7 +44131,7 @@
               <a:defRPr/>
             </a:pPr>
             <a:r>
-              <a:rPr lang="ru-RU" sz="2800" b="1">
+              <a:rPr lang="ru-RU" sz="2200" b="1">
                 <a:solidFill>
                   <a:srgbClr val="404040"/>
                 </a:solidFill>
@@ -44122,14 +44147,14 @@
               <a:defRPr/>
             </a:pPr>
             <a:r>
-              <a:rPr lang="ru-RU" sz="2800" b="1">
+              <a:rPr lang="ru-RU" sz="2200" b="1">
                 <a:solidFill>
                   <a:srgbClr val="404040"/>
                 </a:solidFill>
                 <a:latin typeface="Open Sans"/>
                 <a:cs typeface="Calibri"/>
               </a:rPr>
-              <a:t> </a:t>
+              <a:t xml:space="preserve"> </a:t>
             </a:r>
             <a:endParaRPr/>
           </a:p>
@@ -44138,7 +44163,7 @@
               <a:defRPr/>
             </a:pPr>
             <a:r>
-              <a:rPr lang="ru-RU" sz="2800" b="1">
+              <a:rPr lang="ru-RU" sz="2200" b="1">
                 <a:solidFill>
                   <a:srgbClr val="404040"/>
                 </a:solidFill>
@@ -44154,7 +44179,7 @@
               <a:defRPr/>
             </a:pPr>
             <a:r>
-              <a:rPr lang="ru-RU" sz="2800" b="1">
+              <a:rPr lang="ru-RU" sz="2200" b="1">
                 <a:solidFill>
                   <a:srgbClr val="404040"/>
                 </a:solidFill>
@@ -44170,7 +44195,7 @@
               <a:defRPr/>
             </a:pPr>
             <a:r>
-              <a:rPr lang="ru-RU" sz="2800" b="1">
+              <a:rPr lang="ru-RU" sz="2200" b="1">
                 <a:solidFill>
                   <a:srgbClr val="404040"/>
                 </a:solidFill>
@@ -44186,7 +44211,7 @@
               <a:defRPr/>
             </a:pPr>
             <a:r>
-              <a:rPr lang="ru-RU" sz="2800" b="1">
+              <a:rPr lang="ru-RU" sz="2200" b="1">
                 <a:solidFill>
                   <a:srgbClr val="404040"/>
                 </a:solidFill>
@@ -44202,7 +44227,7 @@
               <a:defRPr/>
             </a:pPr>
             <a:r>
-              <a:rPr lang="ru-RU" sz="2800" b="1">
+              <a:rPr lang="ru-RU" sz="2200" b="1">
                 <a:solidFill>
                   <a:srgbClr val="404040"/>
                 </a:solidFill>
@@ -44215,6 +44240,29 @@
           </a:p>
         </p:txBody>
       </p:sp>
+      <p:pic>
+        <p:nvPicPr>
+          <p:cNvPr id="12" name="Picture 2"/>
+          <p:cNvPicPr>
+            <a:picLocks noChangeAspect="1" noChangeArrowheads="1"/>
+          </p:cNvPicPr>
+          <p:nvPr/>
+        </p:nvPicPr>
+        <p:blipFill>
+          <a:blip r:embed="rId3"/>
+          <a:stretch/>
+        </p:blipFill>
+        <p:spPr bwMode="auto">
+          <a:xfrm>
+            <a:off x="12912081" y="5345832"/>
+            <a:ext cx="10176530" cy="6774744"/>
+          </a:xfrm>
+          <a:prstGeom prst="rect">
+            <a:avLst/>
+          </a:prstGeom>
+          <a:noFill/>
+        </p:spPr>
+      </p:pic>
     </p:spTree>
   </p:cSld>
   <p:clrMapOvr>
@@ -44307,9 +44355,6 @@
               <a:t/>
             </a:fld>
             <a:r>
-              <a:rPr>
-                <a:solidFill/>
-              </a:rPr>
               <a:t>2</a:t>
             </a:r>
             <a:endParaRPr kern="0">
@@ -44688,6 +44733,34 @@
           </a:p>
         </p:txBody>
       </p:sp>
+      <p:pic>
+        <p:nvPicPr>
+          <p:cNvPr id="10" name="Picture 5"/>
+          <p:cNvPicPr>
+            <a:picLocks noChangeAspect="1" noChangeArrowheads="1"/>
+          </p:cNvPicPr>
+          <p:nvPr/>
+        </p:nvPicPr>
+        <p:blipFill>
+          <a:blip r:embed="rId2"/>
+          <a:srcRect t="11351"/>
+          <a:stretch/>
+        </p:blipFill>
+        <p:spPr bwMode="auto">
+          <a:xfrm>
+            <a:off x="1833400" y="7232303"/>
+            <a:ext cx="2727076" cy="5808806"/>
+          </a:xfrm>
+          <a:prstGeom prst="rect">
+            <a:avLst/>
+          </a:prstGeom>
+          <a:noFill/>
+          <a:ln>
+            <a:noFill/>
+          </a:ln>
+          <a:effectLst/>
+        </p:spPr>
+      </p:pic>
       <p:sp>
         <p:nvSpPr>
           <p:cNvPr id="11" name="Овальная выноска 4"/>
@@ -44696,8 +44769,8 @@
         </p:nvSpPr>
         <p:spPr bwMode="auto">
           <a:xfrm>
-            <a:off x="2061252" y="3600000"/>
-            <a:ext cx="20000000" cy="9000000"/>
+            <a:off x="3875079" y="3861098"/>
+            <a:ext cx="7589738" cy="4258675"/>
           </a:xfrm>
           <a:prstGeom prst="wedgeEllipseCallout">
             <a:avLst>
@@ -44732,7 +44805,7 @@
               <a:defRPr/>
             </a:pPr>
             <a:r>
-              <a:rPr lang="ru-RU" sz="2800" b="1">
+              <a:rPr lang="ru-RU" sz="2200" b="1">
                 <a:solidFill>
                   <a:srgbClr val="404040"/>
                 </a:solidFill>
@@ -44748,14 +44821,14 @@
               <a:defRPr/>
             </a:pPr>
             <a:r>
-              <a:rPr lang="ru-RU" sz="2800" b="1">
+              <a:rPr lang="ru-RU" sz="2200" b="1">
                 <a:solidFill>
                   <a:srgbClr val="404040"/>
                 </a:solidFill>
                 <a:latin typeface="Open Sans"/>
                 <a:cs typeface="Calibri"/>
               </a:rPr>
-              <a:t> </a:t>
+              <a:t xml:space="preserve"> </a:t>
             </a:r>
             <a:endParaRPr/>
           </a:p>
@@ -44764,7 +44837,7 @@
               <a:defRPr/>
             </a:pPr>
             <a:r>
-              <a:rPr lang="ru-RU" sz="2800" b="1">
+              <a:rPr lang="ru-RU" sz="2200" b="1">
                 <a:solidFill>
                   <a:srgbClr val="404040"/>
                 </a:solidFill>
@@ -44780,7 +44853,7 @@
               <a:defRPr/>
             </a:pPr>
             <a:r>
-              <a:rPr lang="ru-RU" sz="2800" b="1">
+              <a:rPr lang="ru-RU" sz="2200" b="1">
                 <a:solidFill>
                   <a:srgbClr val="404040"/>
                 </a:solidFill>
@@ -44796,7 +44869,7 @@
               <a:defRPr/>
             </a:pPr>
             <a:r>
-              <a:rPr lang="ru-RU" sz="2800" b="1">
+              <a:rPr lang="ru-RU" sz="2200" b="1">
                 <a:solidFill>
                   <a:srgbClr val="404040"/>
                 </a:solidFill>
@@ -44812,7 +44885,7 @@
               <a:defRPr/>
             </a:pPr>
             <a:r>
-              <a:rPr lang="ru-RU" sz="2800" b="1">
+              <a:rPr lang="ru-RU" sz="2200" b="1">
                 <a:solidFill>
                   <a:srgbClr val="404040"/>
                 </a:solidFill>
@@ -44828,7 +44901,7 @@
               <a:defRPr/>
             </a:pPr>
             <a:r>
-              <a:rPr lang="ru-RU" sz="2800" b="1">
+              <a:rPr lang="ru-RU" sz="2200" b="1">
                 <a:solidFill>
                   <a:srgbClr val="404040"/>
                 </a:solidFill>
@@ -44841,6 +44914,29 @@
           </a:p>
         </p:txBody>
       </p:sp>
+      <p:pic>
+        <p:nvPicPr>
+          <p:cNvPr id="12" name="Picture 2"/>
+          <p:cNvPicPr>
+            <a:picLocks noChangeAspect="1" noChangeArrowheads="1"/>
+          </p:cNvPicPr>
+          <p:nvPr/>
+        </p:nvPicPr>
+        <p:blipFill>
+          <a:blip r:embed="rId3"/>
+          <a:stretch/>
+        </p:blipFill>
+        <p:spPr bwMode="auto">
+          <a:xfrm>
+            <a:off x="12912081" y="5345832"/>
+            <a:ext cx="10176530" cy="6774744"/>
+          </a:xfrm>
+          <a:prstGeom prst="rect">
+            <a:avLst/>
+          </a:prstGeom>
+          <a:noFill/>
+        </p:spPr>
+      </p:pic>
     </p:spTree>
   </p:cSld>
   <p:clrMapOvr>
@@ -44940,9 +45036,6 @@
               <a:t/>
             </a:fld>
             <a:r>
-              <a:rPr>
-                <a:solidFill/>
-              </a:rPr>
               <a:t>3</a:t>
             </a:r>
             <a:endParaRPr kern="0">
@@ -45309,10 +45402,8 @@
               <a:defRPr/>
             </a:pPr>
             <a:r>
-              <a:rPr lang="ru-RU">
-                <a:solidFill/>
-              </a:rPr>
-              <a:t>Тема 1 · п. 1  Организация и нормативно-правовая база</a:t>
+              <a:rPr lang="ru-RU"/>
+              <a:t>Аспекты оказания первой помощи</a:t>
             </a:r>
             <a:endParaRPr lang="ru-RU" dirty="0"/>
           </a:p>
@@ -45391,14 +45482,12 @@
             </a:pPr>
             <a:r>
               <a:rPr lang="ru-RU" sz="2800" b="1">
-                <a:solidFill/>
                 <a:cs typeface="Calibri"/>
               </a:rPr>
               <a:t>Первая помощь </a:t>
             </a:r>
             <a:r>
               <a:rPr lang="ru-RU" sz="2800">
-                <a:solidFill/>
                 <a:cs typeface="Calibri"/>
               </a:rPr>
               <a:t>- комплекс мероприятий, направленных на поддержание жизни и здоровья, оказываемых до оказания медицинской помощи пострадавшим</a:t>
@@ -45538,9 +45627,6 @@
               <a:t/>
             </a:fld>
             <a:r>
-              <a:rPr>
-                <a:solidFill/>
-              </a:rPr>
               <a:t>4</a:t>
             </a:r>
             <a:endParaRPr>
@@ -45940,7 +46026,7 @@
                 <a:ea typeface="Open Sans"/>
                 <a:cs typeface="Open Sans"/>
               </a:rPr>
-              <a:t>Тема 1 · п. 1  Организация и нормативно-правовая база</a:t>
+              <a:t>Аспекты оказания первой помощи</a:t>
             </a:r>
             <a:endParaRPr kumimoji="0" lang="ru-RU" sz="2800" b="0" i="0" u="none" strike="noStrike" kern="0" cap="none" spc="0" normalizeH="0" baseline="0" noProof="0" dirty="0">
               <a:ln>
@@ -45984,13 +46070,8 @@
               <a:defRPr/>
             </a:pPr>
             <a:r>
-              <a:rPr lang="ru-RU" sz="2800" b="1">
-                <a:solidFill/>
-              </a:rPr>
-              <a:t>На сегодняшний день система оказания первой помощи в Российской Федерации состоит из пяти основных компонентов:
-Нормативно-правовое обеспечение (федеральные законы и прочие нормативные акты и документы, определяющие обязанности и права участников оказания первой помощи, их оснащение, объем первой помощи и т.д.).
-Обучение участников оказания первой помощи правилам и навыкам ее оказания.
-Оснащение участников оказания первой помощи средствами для ее оказания (аптечками и укладками).</a:t>
+              <a:rPr lang="ru-RU" sz="2800" b="1"/>
+              <a:t>На сегодняшний день система оказания первой помощи в Российской Федерации состоит из пяти основных компонентов:</a:t>
             </a:r>
             <a:endParaRPr/>
           </a:p>
@@ -46006,10 +46087,8 @@
               <a:defRPr/>
             </a:pPr>
             <a:r>
-              <a:rPr lang="ru-RU" sz="2800">
-                <a:solidFill/>
-              </a:rPr>
-              <a:t/>
+              <a:rPr lang="ru-RU" sz="2800"/>
+              <a:t>Нормативно-правовое обеспечение (федеральные законы и прочие нормативные акты и документы, определяющие обязанности и права участников оказания первой помощи, их оснащение, объем первой помощи и т.д.).</a:t>
             </a:r>
             <a:endParaRPr/>
           </a:p>
@@ -46026,10 +46105,8 @@
               <a:defRPr/>
             </a:pPr>
             <a:r>
-              <a:rPr lang="ru-RU" sz="2800">
-                <a:solidFill/>
-              </a:rPr>
-              <a:t/>
+              <a:rPr lang="ru-RU" sz="2800"/>
+              <a:t>Обучение участников оказания первой помощи правилам и навыкам ее оказания.</a:t>
             </a:r>
             <a:endParaRPr/>
           </a:p>
@@ -46046,10 +46123,8 @@
               <a:defRPr/>
             </a:pPr>
             <a:r>
-              <a:rPr lang="ru-RU" sz="2800">
-                <a:solidFill/>
-              </a:rPr>
-              <a:t/>
+              <a:rPr lang="ru-RU" sz="2800"/>
+              <a:t>Оснащение участников оказания первой помощи средствами для ее оказания (аптечками и укладками).</a:t>
             </a:r>
             <a:endParaRPr/>
           </a:p>
@@ -46230,9 +46305,6 @@
               <a:t/>
             </a:fld>
             <a:r>
-              <a:rPr>
-                <a:solidFill/>
-              </a:rPr>
               <a:t>5</a:t>
             </a:r>
             <a:endParaRPr kumimoji="0" sz="3500" b="0" i="0" u="none" strike="noStrike" kern="0" cap="none" spc="0" normalizeH="0" baseline="0" noProof="0">
@@ -46677,7 +46749,7 @@
                 <a:ea typeface="Open Sans"/>
                 <a:cs typeface="Open Sans"/>
               </a:rPr>
-              <a:t>Тема 1 · п. 1  Организация и нормативно-правовая база</a:t>
+              <a:t>Аспекты оказания первой помощи</a:t>
             </a:r>
             <a:endParaRPr kumimoji="0" lang="ru-RU" sz="2800" b="0" i="0" u="none" strike="noStrike" kern="0" cap="none" spc="0" normalizeH="0" baseline="0" noProof="0" dirty="0">
               <a:ln>
@@ -46721,39 +46793,27 @@
               <a:defRPr/>
             </a:pPr>
             <a:r>
-              <a:rPr lang="ru-RU" sz="2800" b="1">
-                <a:solidFill/>
-              </a:rPr>
+              <a:rPr lang="ru-RU" sz="2800" b="1"/>
               <a:t>Участники оказания первой помощи </a:t>
             </a:r>
             <a:r>
-              <a:rPr lang="ru-RU" sz="2800">
-                <a:solidFill/>
-              </a:rPr>
+              <a:rPr lang="ru-RU" sz="2800"/>
               <a:t>могут иметь различную подготовку к ее оказанию и оснащение. Также они могут быть </a:t>
             </a:r>
             <a:r>
-              <a:rPr lang="ru-RU" sz="2800" b="1">
-                <a:solidFill/>
-              </a:rPr>
+              <a:rPr lang="ru-RU" sz="2800" b="1"/>
               <a:t>обязанными оказывать первую помощь</a:t>
             </a:r>
             <a:r>
-              <a:rPr lang="ru-RU" sz="2800">
-                <a:solidFill/>
-              </a:rPr>
+              <a:rPr lang="ru-RU" sz="2800"/>
               <a:t>, либо </a:t>
             </a:r>
             <a:r>
-              <a:rPr lang="ru-RU" sz="2800" b="1">
-                <a:solidFill/>
-              </a:rPr>
+              <a:rPr lang="ru-RU" sz="2800" b="1"/>
               <a:t>иметь право ее оказывать</a:t>
             </a:r>
             <a:r>
-              <a:rPr lang="ru-RU" sz="2800">
-                <a:solidFill/>
-              </a:rPr>
+              <a:rPr lang="ru-RU" sz="2800"/>
               <a:t>. </a:t>
             </a:r>
           </a:p>
@@ -46768,21 +46828,15 @@
               <a:defRPr/>
             </a:pPr>
             <a:r>
-              <a:rPr lang="ru-RU" sz="2800">
-                <a:solidFill/>
-              </a:rPr>
+              <a:rPr lang="ru-RU" sz="2800"/>
               <a:t>В большинстве случаев первая помощь должна заканчиваться передачей пострадавших прибывшей </a:t>
             </a:r>
             <a:r>
-              <a:rPr lang="ru-RU" sz="2800" b="1">
-                <a:solidFill/>
-              </a:rPr>
+              <a:rPr lang="ru-RU" sz="2800" b="1"/>
               <a:t>бригаде скорой медицинской помощи</a:t>
             </a:r>
             <a:r>
-              <a:rPr lang="ru-RU" sz="2800">
-                <a:solidFill/>
-              </a:rPr>
+              <a:rPr lang="ru-RU" sz="2800"/>
               <a:t>, которая, продолжая оказание помощи в пути, доставляет пострадавшего в лечебное учреждение.</a:t>
             </a:r>
             <a:endParaRPr/>
@@ -46956,9 +47010,6 @@
               <a:t/>
             </a:fld>
             <a:r>
-              <a:rPr>
-                <a:solidFill/>
-              </a:rPr>
               <a:t>6</a:t>
             </a:r>
             <a:endParaRPr kumimoji="0" sz="3500" b="0" i="0" u="none" strike="noStrike" kern="0" cap="none" spc="0" normalizeH="0" baseline="0" noProof="0">
@@ -47401,7 +47452,7 @@
                 <a:ea typeface="Open Sans"/>
                 <a:cs typeface="Open Sans"/>
               </a:rPr>
-              <a:t>Тема 1 · п. 1  Организация и нормативно-правовая база</a:t>
+              <a:t>Аспекты оказания первой помощи</a:t>
             </a:r>
             <a:endParaRPr kumimoji="0" lang="ru-RU" sz="2800" b="0" i="0" u="none" strike="noStrike" kern="0" cap="none" spc="0" normalizeH="0" baseline="0" noProof="0" dirty="0">
               <a:ln>
@@ -47445,21 +47496,15 @@
               <a:defRPr/>
             </a:pPr>
             <a:r>
-              <a:rPr lang="ru-RU" sz="2800">
-                <a:solidFill/>
-              </a:rPr>
+              <a:rPr lang="ru-RU" sz="2800"/>
               <a:t>Федеральный закон от 21.11.2011 №323-ФЗ </a:t>
             </a:r>
             <a:r>
-              <a:rPr lang="ru-RU" sz="2800" b="1">
-                <a:solidFill/>
-              </a:rPr>
+              <a:rPr lang="ru-RU" sz="2800" b="1"/>
               <a:t>«Об основах охраны здоровья граждан Российской Федерации»</a:t>
             </a:r>
             <a:r>
-              <a:rPr lang="ru-RU" sz="2800">
-                <a:solidFill/>
-              </a:rPr>
+              <a:rPr lang="ru-RU" sz="2800"/>
               <a:t>:</a:t>
             </a:r>
             <a:endParaRPr/>
@@ -47475,9 +47520,7 @@
               <a:defRPr/>
             </a:pPr>
             <a:r>
-              <a:rPr lang="ru-RU" sz="2800" b="1">
-                <a:solidFill/>
-              </a:rPr>
+              <a:rPr lang="ru-RU" sz="2800" b="1"/>
               <a:t>Статья 31. Первая помощь:</a:t>
             </a:r>
             <a:endParaRPr/>
@@ -47493,9 +47536,7 @@
               <a:defRPr/>
             </a:pPr>
             <a:r>
-              <a:rPr lang="ru-RU" sz="2800">
-                <a:solidFill/>
-              </a:rPr>
+              <a:rPr lang="ru-RU" sz="2800"/>
               <a:t>«1. Первая помощь до оказания медицинской помощи оказывается гражданам при несчастных случаях, травмах, отравлениях и других состояниях и заболеваниях, угрожающих их жизни и здоровью…»</a:t>
             </a:r>
             <a:endParaRPr/>
@@ -47511,9 +47552,7 @@
               <a:defRPr/>
             </a:pPr>
             <a:r>
-              <a:rPr lang="ru-RU" sz="2800">
-                <a:solidFill/>
-              </a:rPr>
+              <a:rPr lang="ru-RU" sz="2800"/>
               <a:t>« 4. Водители транспортных средств и другие лица вправе оказывать первую помощь при наличии соответствующей подготовки и (или) навыков.»</a:t>
             </a:r>
           </a:p>
@@ -47689,9 +47728,6 @@
               <a:t/>
             </a:fld>
             <a:r>
-              <a:rPr>
-                <a:solidFill/>
-              </a:rPr>
               <a:t>7</a:t>
             </a:r>
             <a:endParaRPr kumimoji="0" sz="3500" b="0" i="0" u="none" strike="noStrike" kern="0" cap="none" spc="0" normalizeH="0" baseline="0" noProof="0">
@@ -48152,7 +48188,7 @@
                 <a:ea typeface="Open Sans"/>
                 <a:cs typeface="Open Sans"/>
               </a:rPr>
-              <a:t>Тема 1 · п. 1  Организация и нормативно-правовая база</a:t>
+              <a:t>Аспекты оказания первой помощи</a:t>
             </a:r>
             <a:endParaRPr kumimoji="0" lang="ru-RU" sz="2800" b="0" i="0" u="none" strike="noStrike" kern="0" cap="none" spc="0" normalizeH="0" baseline="0" noProof="0" dirty="0">
               <a:ln>
@@ -48196,21 +48232,15 @@
               <a:defRPr/>
             </a:pPr>
             <a:r>
-              <a:rPr lang="ru-RU">
-                <a:solidFill/>
-              </a:rPr>
+              <a:rPr lang="ru-RU"/>
               <a:t>Законодательство разного уровня устанавливает обязанность по оказанию первой помощи для лиц, которые </a:t>
             </a:r>
             <a:r>
-              <a:rPr lang="ru-RU" b="1">
-                <a:solidFill/>
-              </a:rPr>
+              <a:rPr lang="ru-RU" b="1"/>
               <a:t>в силу профессиональных обязанностей первыми оказываются на месте происшествия </a:t>
             </a:r>
             <a:r>
-              <a:rPr lang="ru-RU">
-                <a:solidFill/>
-              </a:rPr>
+              <a:rPr lang="ru-RU"/>
               <a:t>с пострадавшими.</a:t>
             </a:r>
             <a:endParaRPr/>
@@ -48226,57 +48256,39 @@
               <a:defRPr/>
             </a:pPr>
             <a:r>
-              <a:rPr lang="ru-RU">
-                <a:solidFill/>
-              </a:rPr>
+              <a:rPr lang="ru-RU"/>
               <a:t>Обязанность </a:t>
             </a:r>
             <a:r>
-              <a:rPr lang="ru-RU" b="1">
-                <a:solidFill/>
-              </a:rPr>
+              <a:rPr lang="ru-RU" b="1"/>
               <a:t>«…принять меры для оказания первой помощи…» </a:t>
             </a:r>
             <a:r>
-              <a:rPr lang="ru-RU">
-                <a:solidFill/>
-              </a:rPr>
+              <a:rPr lang="ru-RU"/>
               <a:t>возникает у водителей, причастных к ДТП (п. 2.6 ПДД РФ). Принятие мер к оказанию первой помощи относится к обязанностям водителя в связи с ДТП, за невыполнение которых водителю грозит </a:t>
             </a:r>
             <a:r>
-              <a:rPr lang="ru-RU" b="1">
-                <a:solidFill/>
-              </a:rPr>
+              <a:rPr lang="ru-RU" b="1"/>
               <a:t>привлечение к административной ответственности и наказание в виде административного штрафа </a:t>
             </a:r>
             <a:r>
-              <a:rPr lang="ru-RU">
-                <a:solidFill/>
-              </a:rPr>
+              <a:rPr lang="ru-RU"/>
               <a:t>(ч. 1 ст. 12.27 КоАП). В том случае, если гражданин </a:t>
             </a:r>
             <a:r>
-              <a:rPr lang="ru-RU" b="1">
-                <a:solidFill/>
-              </a:rPr>
+              <a:rPr lang="ru-RU" b="1"/>
               <a:t>заведомо оставил пострадавшего</a:t>
             </a:r>
             <a:r>
-              <a:rPr lang="ru-RU">
-                <a:solidFill/>
-              </a:rPr>
+              <a:rPr lang="ru-RU"/>
               <a:t>, находящегося в беспомощном состоянии без возможности получения помощи, </a:t>
             </a:r>
             <a:r>
-              <a:rPr lang="ru-RU" b="1">
-                <a:solidFill/>
-              </a:rPr>
+              <a:rPr lang="ru-RU" b="1"/>
               <a:t>он может быть привлечен к уголовной ответственности </a:t>
             </a:r>
             <a:r>
-              <a:rPr lang="ru-RU">
-                <a:solidFill/>
-              </a:rPr>
+              <a:rPr lang="ru-RU"/>
               <a:t>(ст. 125 «Оставление в опасности» УК РФ). </a:t>
             </a:r>
           </a:p>
@@ -48291,21 +48303,15 @@
               <a:defRPr/>
             </a:pPr>
             <a:r>
-              <a:rPr lang="ru-RU">
-                <a:solidFill/>
-              </a:rPr>
+              <a:rPr lang="ru-RU"/>
               <a:t>В том случае, если водитель не причастен к ДТП, но стал его свидетелем, согласно ч. 4 ст. 31 Федерального закона № 323-ФЗ «Об основах охраны здоровья граждан в Российской Федерации», </a:t>
             </a:r>
             <a:r>
-              <a:rPr lang="ru-RU" b="1">
-                <a:solidFill/>
-              </a:rPr>
+              <a:rPr lang="ru-RU" b="1"/>
               <a:t>водитель вправе добровольно оказать первую помощь</a:t>
             </a:r>
             <a:r>
-              <a:rPr lang="ru-RU">
-                <a:solidFill/>
-              </a:rPr>
+              <a:rPr lang="ru-RU"/>
               <a:t>.</a:t>
             </a:r>
           </a:p>
@@ -48485,9 +48491,6 @@
               <a:t/>
             </a:fld>
             <a:r>
-              <a:rPr>
-                <a:solidFill/>
-              </a:rPr>
               <a:t>8</a:t>
             </a:r>
             <a:endParaRPr kumimoji="0" sz="3500" b="0" i="0" u="none" strike="noStrike" kern="0" cap="none" spc="0" normalizeH="0" baseline="0" noProof="0">
@@ -48948,7 +48951,7 @@
                 <a:ea typeface="Open Sans"/>
                 <a:cs typeface="Open Sans"/>
               </a:rPr>
-              <a:t>Тема 1 · п. 1  Организация и нормативно-правовая база</a:t>
+              <a:t>Аспекты оказания первой помощи</a:t>
             </a:r>
             <a:endParaRPr kumimoji="0" lang="ru-RU" sz="2800" b="0" i="0" u="none" strike="noStrike" kern="0" cap="none" spc="0" normalizeH="0" baseline="0" noProof="0" dirty="0">
               <a:ln>
@@ -48992,21 +48995,15 @@
               <a:defRPr/>
             </a:pPr>
             <a:r>
-              <a:rPr lang="ru-RU" sz="2800" dirty="0">
-                <a:solidFill/>
-              </a:rPr>
+              <a:rPr lang="ru-RU" sz="2800" dirty="0"/>
               <a:t>Статья 228 Трудового кодекса Российской Федерации предусматривает обязанность работодателя при несчастном случае на производстве </a:t>
             </a:r>
             <a:r>
-              <a:rPr lang="ru-RU" sz="2800" b="1" dirty="0">
-                <a:solidFill/>
-              </a:rPr>
+              <a:rPr lang="ru-RU" sz="2800" b="1" dirty="0"/>
               <a:t>«немедленно организовать первую помощь пострадавшему и при необходимости доставку его в медицинскую организацию»</a:t>
             </a:r>
             <a:r>
-              <a:rPr lang="ru-RU" sz="2800" dirty="0">
-                <a:solidFill/>
-              </a:rPr>
+              <a:rPr lang="ru-RU" sz="2800" dirty="0"/>
               <a:t>. </a:t>
             </a:r>
           </a:p>
@@ -49021,21 +49018,15 @@
               <a:defRPr/>
             </a:pPr>
             <a:r>
-              <a:rPr lang="ru-RU" sz="2800" dirty="0">
-                <a:solidFill/>
-              </a:rPr>
+              <a:rPr lang="ru-RU" sz="2800" dirty="0"/>
               <a:t>Для организации оказания первой помощи при несчастном случае на производстве силами работников на работодателя возложена обязанность </a:t>
             </a:r>
             <a:r>
-              <a:rPr lang="ru-RU" sz="2800" b="1" dirty="0">
-                <a:solidFill/>
-              </a:rPr>
+              <a:rPr lang="ru-RU" sz="2800" b="1" dirty="0"/>
               <a:t>организовывать обучение первой помощи </a:t>
             </a:r>
             <a:r>
-              <a:rPr lang="ru-RU" sz="2800" dirty="0">
-                <a:solidFill/>
-              </a:rPr>
+              <a:rPr lang="ru-RU" sz="2800" dirty="0"/>
               <a:t>для всех поступающих на работу лиц, а также для работников, переводимых на другую работу (ст. 214, 219 ТК РФ). </a:t>
             </a:r>
             <a:endParaRPr dirty="0"/>
@@ -49051,21 +49042,15 @@
               <a:defRPr/>
             </a:pPr>
             <a:r>
-              <a:rPr lang="ru-RU" sz="2800" dirty="0">
-                <a:solidFill/>
-              </a:rPr>
+              <a:rPr lang="ru-RU" sz="2800" dirty="0"/>
               <a:t>Для работника ТК РФ предусматривает обязанность </a:t>
             </a:r>
             <a:r>
-              <a:rPr lang="ru-RU" sz="2800" b="1" dirty="0">
-                <a:solidFill/>
-              </a:rPr>
+              <a:rPr lang="ru-RU" sz="2800" b="1" dirty="0"/>
               <a:t>«проходить обучение по оказанию первой помощи пострадавшим на производстве» </a:t>
             </a:r>
             <a:r>
-              <a:rPr lang="ru-RU" sz="2800" dirty="0">
-                <a:solidFill/>
-              </a:rPr>
+              <a:rPr lang="ru-RU" sz="2800" dirty="0"/>
               <a:t>(ст. 215 ТК РФ). </a:t>
             </a:r>
           </a:p>
@@ -49234,9 +49219,6 @@
               <a:t/>
             </a:fld>
             <a:r>
-              <a:rPr>
-                <a:solidFill/>
-              </a:rPr>
               <a:t>9</a:t>
             </a:r>
             <a:endParaRPr kumimoji="0" sz="3500" b="0" i="0" u="none" strike="noStrike" kern="0" cap="none" spc="0" normalizeH="0" baseline="0" noProof="0">
@@ -49697,7 +49679,7 @@
                 <a:ea typeface="Open Sans"/>
                 <a:cs typeface="Open Sans"/>
               </a:rPr>
-              <a:t>Тема 1 · п. 1  Организация и нормативно-правовая база</a:t>
+              <a:t>Аспекты оказания первой помощи</a:t>
             </a:r>
             <a:endParaRPr kumimoji="0" lang="ru-RU" sz="2800" b="0" i="0" u="none" strike="noStrike" kern="0" cap="none" spc="0" normalizeH="0" baseline="0" noProof="0" dirty="0">
               <a:ln>
@@ -49741,9 +49723,7 @@
               <a:defRPr/>
             </a:pPr>
             <a:r>
-              <a:rPr lang="ru-RU" sz="2800" b="1">
-                <a:solidFill/>
-              </a:rPr>
+              <a:rPr lang="ru-RU" sz="2800" b="1"/>
               <a:t>Освобождение от ответственности:</a:t>
             </a:r>
             <a:endParaRPr/>
@@ -49759,9 +49739,7 @@
               <a:defRPr/>
             </a:pPr>
             <a:r>
-              <a:rPr lang="ru-RU" sz="2800" b="1">
-                <a:solidFill/>
-              </a:rPr>
+              <a:rPr lang="ru-RU" sz="2800" b="1"/>
               <a:t>УК РФ ст. 39. Крайняя необходимость:</a:t>
             </a:r>
             <a:endParaRPr/>
@@ -49777,9 +49755,7 @@
               <a:defRPr/>
             </a:pPr>
             <a:r>
-              <a:rPr lang="ru-RU" sz="2800">
-                <a:solidFill/>
-              </a:rPr>
+              <a:rPr lang="ru-RU" sz="2800"/>
               <a:t>«Не является преступлением причинение вреда … в состоянии крайней необходимости, то есть для устранения опасности, непосредственно угрожающей личности и правам данного лица …»</a:t>
             </a:r>
             <a:endParaRPr/>
@@ -49795,9 +49771,7 @@
               <a:defRPr/>
             </a:pPr>
             <a:r>
-              <a:rPr lang="ru-RU" sz="2800" b="1">
-                <a:solidFill/>
-              </a:rPr>
+              <a:rPr lang="ru-RU" sz="2800" b="1"/>
               <a:t>КоАП РФ ст. 2.7. Крайняя необходимость:</a:t>
             </a:r>
             <a:endParaRPr/>
@@ -49813,9 +49787,7 @@
               <a:defRPr/>
             </a:pPr>
             <a:r>
-              <a:rPr lang="ru-RU" sz="2800">
-                <a:solidFill/>
-              </a:rPr>
+              <a:rPr lang="ru-RU" sz="2800"/>
               <a:t>«Не является административным правонарушением причинение лицом вреда … в состоянии крайней необходимости, то есть для устранения опасности, непосредственно угрожающей личности и правам данного лица …»</a:t>
             </a:r>
             <a:endParaRPr/>
@@ -49831,21 +49803,15 @@
               <a:defRPr/>
             </a:pPr>
             <a:r>
-              <a:rPr lang="ru-RU" sz="2800">
-                <a:solidFill/>
-              </a:rPr>
+              <a:rPr lang="ru-RU" sz="2800"/>
               <a:t>В случае решения в суде вопроса о привлечении лица к ответственности за причинение вреда жизни или здоровью, оказание первой помощи пострадавшему учитывается как </a:t>
             </a:r>
             <a:r>
-              <a:rPr lang="ru-RU" sz="2800" b="1">
-                <a:solidFill/>
-              </a:rPr>
+              <a:rPr lang="ru-RU" sz="2800" b="1"/>
               <a:t>обстоятельство, смягчающее наказание </a:t>
             </a:r>
             <a:r>
-              <a:rPr lang="ru-RU" sz="2800">
-                <a:solidFill/>
-              </a:rPr>
+              <a:rPr lang="ru-RU" sz="2800"/>
               <a:t>(п. 2 ч. 1 ст. 4.2 Кодекса Российской Федерации об административных правонарушениях; п. «к» ч. 1 ст. 61 Уголовного Кодекса Российской Федерации).</a:t>
             </a:r>
             <a:endParaRPr/>
